--- a/Mapped Curriculum Lessons/Grade 7/Lesson 17 - Lists/Lists - Slides.pptx
+++ b/Mapped Curriculum Lessons/Grade 7/Lesson 17 - Lists/Lists - Slides.pptx
@@ -2,28 +2,28 @@
 <file path=ppt/presentation.xml><?xml version="1.0" encoding="utf-8"?>
 <p:presentation xmlns:p="http://schemas.openxmlformats.org/presentationml/2006/main" embedTrueTypeFonts="1" saveSubsetFonts="0">
   <p:sldMasterIdLst>
-    <p:sldMasterId xmlns:r="http://schemas.openxmlformats.org/officeDocument/2006/relationships" id="2147483648" r:id="R43034108db864cf9"/>
+    <p:sldMasterId xmlns:r="http://schemas.openxmlformats.org/officeDocument/2006/relationships" id="2147483648" r:id="Rf9211fe82b504b9c"/>
   </p:sldMasterIdLst>
   <p:notesMasterIdLst>
-    <p:notesMasterId xmlns:r="http://schemas.openxmlformats.org/officeDocument/2006/relationships" r:id="R6c944b1332f443e1"/>
+    <p:notesMasterId xmlns:r="http://schemas.openxmlformats.org/officeDocument/2006/relationships" r:id="R0f9e6d6e52694058"/>
   </p:notesMasterIdLst>
   <p:sldIdLst>
-    <p:sldId xmlns:r="http://schemas.openxmlformats.org/officeDocument/2006/relationships" id="256" r:id="R1a69670401be4606"/>
-    <p:sldId xmlns:r="http://schemas.openxmlformats.org/officeDocument/2006/relationships" id="257" r:id="R9302652016c147cd"/>
-    <p:sldId xmlns:r="http://schemas.openxmlformats.org/officeDocument/2006/relationships" id="258" r:id="Rb9fd78a8f4da4ca4"/>
-    <p:sldId xmlns:r="http://schemas.openxmlformats.org/officeDocument/2006/relationships" id="259" r:id="Rf7c444bf0dd04763"/>
-    <p:sldId xmlns:r="http://schemas.openxmlformats.org/officeDocument/2006/relationships" id="260" r:id="R618bdf698b6d4312"/>
-    <p:sldId xmlns:r="http://schemas.openxmlformats.org/officeDocument/2006/relationships" id="261" r:id="R562bd392833d46d9"/>
-    <p:sldId xmlns:r="http://schemas.openxmlformats.org/officeDocument/2006/relationships" id="262" r:id="R1fcf4e0aa7814c7d"/>
-    <p:sldId xmlns:r="http://schemas.openxmlformats.org/officeDocument/2006/relationships" id="263" r:id="Rd573bd7d1f564538"/>
-    <p:sldId xmlns:r="http://schemas.openxmlformats.org/officeDocument/2006/relationships" id="264" r:id="R49d0abba0aa44ecc"/>
+    <p:sldId xmlns:r="http://schemas.openxmlformats.org/officeDocument/2006/relationships" id="256" r:id="R772c3792c48d4805"/>
+    <p:sldId xmlns:r="http://schemas.openxmlformats.org/officeDocument/2006/relationships" id="257" r:id="R615ea62bb2dc4a19"/>
+    <p:sldId xmlns:r="http://schemas.openxmlformats.org/officeDocument/2006/relationships" id="258" r:id="R554fc44338804575"/>
+    <p:sldId xmlns:r="http://schemas.openxmlformats.org/officeDocument/2006/relationships" id="259" r:id="R11b68acc773b4423"/>
+    <p:sldId xmlns:r="http://schemas.openxmlformats.org/officeDocument/2006/relationships" id="260" r:id="R30e2e87c450b4067"/>
+    <p:sldId xmlns:r="http://schemas.openxmlformats.org/officeDocument/2006/relationships" id="261" r:id="Ra0f9fb6fb0e04563"/>
+    <p:sldId xmlns:r="http://schemas.openxmlformats.org/officeDocument/2006/relationships" id="262" r:id="R98ceb4985e894cf0"/>
+    <p:sldId xmlns:r="http://schemas.openxmlformats.org/officeDocument/2006/relationships" id="263" r:id="R15faebe9c5b14f8b"/>
+    <p:sldId xmlns:r="http://schemas.openxmlformats.org/officeDocument/2006/relationships" id="264" r:id="Rb1b277a424c84044"/>
   </p:sldIdLst>
   <p:sldSz cx="12192000" cy="6858000"/>
   <p:notesSz cx="6858000" cy="9144000"/>
   <p:embeddedFontLst>
     <p:embeddedFont>
       <p:font typeface="JetBrains Mono"/>
-      <p:regular xmlns:r="http://schemas.openxmlformats.org/officeDocument/2006/relationships" r:id="Ra1445365dde345c8"/>
+      <p:regular xmlns:r="http://schemas.openxmlformats.org/officeDocument/2006/relationships" r:id="Rebaeede2b58c4807"/>
     </p:embeddedFont>
   </p:embeddedFontLst>
 </p:presentation>
@@ -1071,7 +1071,7 @@
           <p:nvPr/>
         </p:nvPicPr>
         <p:blipFill rotWithShape="1">
-          <a:blip xmlns:r="http://schemas.openxmlformats.org/officeDocument/2006/relationships" xmlns:a="http://schemas.openxmlformats.org/drawingml/2006/main" r:embed="R887924928b7d4a64"/>
+          <a:blip xmlns:r="http://schemas.openxmlformats.org/officeDocument/2006/relationships" xmlns:a="http://schemas.openxmlformats.org/drawingml/2006/main" r:embed="R61d60bf175e447a0"/>
           <a:stretch xmlns:a="http://schemas.openxmlformats.org/drawingml/2006/main"/>
         </p:blipFill>
         <p:spPr>
@@ -1451,7 +1451,7 @@
           <p:nvPr/>
         </p:nvPicPr>
         <p:blipFill rotWithShape="1">
-          <a:blip xmlns:r="http://schemas.openxmlformats.org/officeDocument/2006/relationships" xmlns:a="http://schemas.openxmlformats.org/drawingml/2006/main" r:embed="Rf4eeaf28d9b04c5e">
+          <a:blip xmlns:r="http://schemas.openxmlformats.org/officeDocument/2006/relationships" xmlns:a="http://schemas.openxmlformats.org/drawingml/2006/main" r:embed="R01659345d2544ce2">
             <a:alphaModFix amt="28000"/>
           </a:blip>
           <a:stretch xmlns:a="http://schemas.openxmlformats.org/drawingml/2006/main"/>
@@ -1664,7 +1664,7 @@
           <p:nvPr/>
         </p:nvPicPr>
         <p:blipFill rotWithShape="1">
-          <a:blip xmlns:r="http://schemas.openxmlformats.org/officeDocument/2006/relationships" xmlns:a="http://schemas.openxmlformats.org/drawingml/2006/main" r:embed="Rd6d71c8a02704444">
+          <a:blip xmlns:r="http://schemas.openxmlformats.org/officeDocument/2006/relationships" xmlns:a="http://schemas.openxmlformats.org/drawingml/2006/main" r:embed="Rc2664afff8c04521">
             <a:alphaModFix amt="28000"/>
           </a:blip>
           <a:stretch xmlns:a="http://schemas.openxmlformats.org/drawingml/2006/main"/>
@@ -1899,7 +1899,7 @@
           <p:nvPr/>
         </p:nvPicPr>
         <p:blipFill rotWithShape="1">
-          <a:blip xmlns:r="http://schemas.openxmlformats.org/officeDocument/2006/relationships" xmlns:a="http://schemas.openxmlformats.org/drawingml/2006/main" r:embed="R2e7ca47eebe141ed">
+          <a:blip xmlns:r="http://schemas.openxmlformats.org/officeDocument/2006/relationships" xmlns:a="http://schemas.openxmlformats.org/drawingml/2006/main" r:embed="Raa74e6a9abbd4b7a">
             <a:alphaModFix amt="28000"/>
           </a:blip>
           <a:stretch xmlns:a="http://schemas.openxmlformats.org/drawingml/2006/main"/>
@@ -2176,7 +2176,7 @@
           <p:nvPr/>
         </p:nvPicPr>
         <p:blipFill rotWithShape="1">
-          <a:blip xmlns:r="http://schemas.openxmlformats.org/officeDocument/2006/relationships" xmlns:a="http://schemas.openxmlformats.org/drawingml/2006/main" r:embed="Rd8cfba1c834e486f">
+          <a:blip xmlns:r="http://schemas.openxmlformats.org/officeDocument/2006/relationships" xmlns:a="http://schemas.openxmlformats.org/drawingml/2006/main" r:embed="Rd2d9ae5c29d946c6">
             <a:alphaModFix amt="28000"/>
           </a:blip>
           <a:stretch xmlns:a="http://schemas.openxmlformats.org/drawingml/2006/main"/>
@@ -2451,7 +2451,7 @@
           <p:nvPr/>
         </p:nvPicPr>
         <p:blipFill rotWithShape="1">
-          <a:blip xmlns:r="http://schemas.openxmlformats.org/officeDocument/2006/relationships" xmlns:a="http://schemas.openxmlformats.org/drawingml/2006/main" r:embed="R6059fed314894d0b">
+          <a:blip xmlns:r="http://schemas.openxmlformats.org/officeDocument/2006/relationships" xmlns:a="http://schemas.openxmlformats.org/drawingml/2006/main" r:embed="Rd6f0528d99744ca3">
             <a:alphaModFix amt="28000"/>
           </a:blip>
           <a:stretch xmlns:a="http://schemas.openxmlformats.org/drawingml/2006/main"/>
@@ -2875,7 +2875,7 @@
           <p:nvPr/>
         </p:nvPicPr>
         <p:blipFill rotWithShape="1">
-          <a:blip xmlns:r="http://schemas.openxmlformats.org/officeDocument/2006/relationships" xmlns:a="http://schemas.openxmlformats.org/drawingml/2006/main" r:embed="R1dee78f2b3344953">
+          <a:blip xmlns:r="http://schemas.openxmlformats.org/officeDocument/2006/relationships" xmlns:a="http://schemas.openxmlformats.org/drawingml/2006/main" r:embed="R24a939f55cb6455f">
             <a:alphaModFix amt="28000"/>
           </a:blip>
           <a:stretch xmlns:a="http://schemas.openxmlformats.org/drawingml/2006/main"/>
@@ -3016,7 +3016,7 @@
           <p:nvPr/>
         </p:nvPicPr>
         <p:blipFill rotWithShape="1">
-          <a:blip xmlns:r="http://schemas.openxmlformats.org/officeDocument/2006/relationships" xmlns:a="http://schemas.openxmlformats.org/drawingml/2006/main" r:embed="R18f130b834974dd0">
+          <a:blip xmlns:r="http://schemas.openxmlformats.org/officeDocument/2006/relationships" xmlns:a="http://schemas.openxmlformats.org/drawingml/2006/main" r:embed="R7e28615456a545cf">
             <a:alphaModFix amt="28000"/>
           </a:blip>
           <a:stretch xmlns:a="http://schemas.openxmlformats.org/drawingml/2006/main"/>
@@ -3130,7 +3130,7 @@
           <p:nvPr/>
         </p:nvPicPr>
         <p:blipFill rotWithShape="1">
-          <a:blip xmlns:r="http://schemas.openxmlformats.org/officeDocument/2006/relationships" xmlns:a="http://schemas.openxmlformats.org/drawingml/2006/main" r:embed="R306d1b0ffaf24a74">
+          <a:blip xmlns:r="http://schemas.openxmlformats.org/officeDocument/2006/relationships" xmlns:a="http://schemas.openxmlformats.org/drawingml/2006/main" r:embed="Rbbe08f8fec79494e">
             <a:alphaModFix amt="28000"/>
           </a:blip>
           <a:stretch xmlns:a="http://schemas.openxmlformats.org/drawingml/2006/main"/>
@@ -3457,7 +3457,7 @@
           <p:nvPr/>
         </p:nvPicPr>
         <p:blipFill rotWithShape="1">
-          <a:blip xmlns:r="http://schemas.openxmlformats.org/officeDocument/2006/relationships" xmlns:a="http://schemas.openxmlformats.org/drawingml/2006/main" r:embed="Rda08c12cb35142f1">
+          <a:blip xmlns:r="http://schemas.openxmlformats.org/officeDocument/2006/relationships" xmlns:a="http://schemas.openxmlformats.org/drawingml/2006/main" r:embed="R6517758e321e4bc1">
             <a:alphaModFix amt="28000"/>
           </a:blip>
           <a:stretch xmlns:a="http://schemas.openxmlformats.org/drawingml/2006/main"/>
@@ -3745,7 +3745,7 @@
           <p:nvPr/>
         </p:nvPicPr>
         <p:blipFill rotWithShape="1">
-          <a:blip xmlns:r="http://schemas.openxmlformats.org/officeDocument/2006/relationships" xmlns:a="http://schemas.openxmlformats.org/drawingml/2006/main" r:embed="Re7fe4b86fa414554">
+          <a:blip xmlns:r="http://schemas.openxmlformats.org/officeDocument/2006/relationships" xmlns:a="http://schemas.openxmlformats.org/drawingml/2006/main" r:embed="Ra289faf09ac14f1d">
             <a:alphaModFix amt="28000"/>
           </a:blip>
           <a:stretch xmlns:a="http://schemas.openxmlformats.org/drawingml/2006/main"/>
@@ -3982,17 +3982,17 @@
   </p:cSld>
   <p:clrMap bg1="lt1" tx1="dk1" bg2="lt2" tx2="dk2" accent1="accent1" accent2="accent2" accent3="accent3" accent4="accent4" accent5="accent5" accent6="accent6" hlink="hlink" folHlink="folHlink"/>
   <p:sldLayoutIdLst>
-    <p:sldLayoutId xmlns:r="http://schemas.openxmlformats.org/officeDocument/2006/relationships" id="2147483649" r:id="R01e477665bc94705"/>
-    <p:sldLayoutId xmlns:r="http://schemas.openxmlformats.org/officeDocument/2006/relationships" id="2147483650" r:id="R710de0da7f6c4343"/>
-    <p:sldLayoutId xmlns:r="http://schemas.openxmlformats.org/officeDocument/2006/relationships" id="2147483651" r:id="Rbeb0322adba14cf5"/>
-    <p:sldLayoutId xmlns:r="http://schemas.openxmlformats.org/officeDocument/2006/relationships" id="2147483652" r:id="R660e87a964784aab"/>
-    <p:sldLayoutId xmlns:r="http://schemas.openxmlformats.org/officeDocument/2006/relationships" id="2147483653" r:id="R0f70fd4a6be44d89"/>
-    <p:sldLayoutId xmlns:r="http://schemas.openxmlformats.org/officeDocument/2006/relationships" id="2147483654" r:id="R99a2828e82ca47f3"/>
-    <p:sldLayoutId xmlns:r="http://schemas.openxmlformats.org/officeDocument/2006/relationships" id="2147483655" r:id="R758b014ba7304322"/>
-    <p:sldLayoutId xmlns:r="http://schemas.openxmlformats.org/officeDocument/2006/relationships" id="2147483656" r:id="R5d8abf6365d64436"/>
-    <p:sldLayoutId xmlns:r="http://schemas.openxmlformats.org/officeDocument/2006/relationships" id="2147483657" r:id="R883b1baf446745a3"/>
-    <p:sldLayoutId xmlns:r="http://schemas.openxmlformats.org/officeDocument/2006/relationships" id="2147483658" r:id="R12d56f681728454b"/>
-    <p:sldLayoutId xmlns:r="http://schemas.openxmlformats.org/officeDocument/2006/relationships" id="2147483659" r:id="R664c006eb38345d0"/>
+    <p:sldLayoutId xmlns:r="http://schemas.openxmlformats.org/officeDocument/2006/relationships" id="2147483649" r:id="Ra485dcbc00864643"/>
+    <p:sldLayoutId xmlns:r="http://schemas.openxmlformats.org/officeDocument/2006/relationships" id="2147483650" r:id="Rf4fd7393a4824f26"/>
+    <p:sldLayoutId xmlns:r="http://schemas.openxmlformats.org/officeDocument/2006/relationships" id="2147483651" r:id="Re18dc0bd1e424fcd"/>
+    <p:sldLayoutId xmlns:r="http://schemas.openxmlformats.org/officeDocument/2006/relationships" id="2147483652" r:id="Ra99d4c5a83dc478f"/>
+    <p:sldLayoutId xmlns:r="http://schemas.openxmlformats.org/officeDocument/2006/relationships" id="2147483653" r:id="R09ad46374e3e43e7"/>
+    <p:sldLayoutId xmlns:r="http://schemas.openxmlformats.org/officeDocument/2006/relationships" id="2147483654" r:id="R83000ac4f42348eb"/>
+    <p:sldLayoutId xmlns:r="http://schemas.openxmlformats.org/officeDocument/2006/relationships" id="2147483655" r:id="Rb353325f13b14771"/>
+    <p:sldLayoutId xmlns:r="http://schemas.openxmlformats.org/officeDocument/2006/relationships" id="2147483656" r:id="R2e4c1bb0723043d4"/>
+    <p:sldLayoutId xmlns:r="http://schemas.openxmlformats.org/officeDocument/2006/relationships" id="2147483657" r:id="R119f063cb1be4aaa"/>
+    <p:sldLayoutId xmlns:r="http://schemas.openxmlformats.org/officeDocument/2006/relationships" id="2147483658" r:id="Rbf33e3e15e954bda"/>
+    <p:sldLayoutId xmlns:r="http://schemas.openxmlformats.org/officeDocument/2006/relationships" id="2147483659" r:id="R73fcfd81ca934763"/>
   </p:sldLayoutIdLst>
   <p:hf hdr="0" ftr="0" dt="0"/>
   <p:txStyles>

--- a/Mapped Curriculum Lessons/Grade 7/Lesson 17 - Lists/Lists - Slides.pptx
+++ b/Mapped Curriculum Lessons/Grade 7/Lesson 17 - Lists/Lists - Slides.pptx
@@ -2,28 +2,28 @@
 <file path=ppt/presentation.xml><?xml version="1.0" encoding="utf-8"?>
 <p:presentation xmlns:p="http://schemas.openxmlformats.org/presentationml/2006/main" embedTrueTypeFonts="1" saveSubsetFonts="0">
   <p:sldMasterIdLst>
-    <p:sldMasterId xmlns:r="http://schemas.openxmlformats.org/officeDocument/2006/relationships" id="2147483648" r:id="Rf9211fe82b504b9c"/>
+    <p:sldMasterId xmlns:r="http://schemas.openxmlformats.org/officeDocument/2006/relationships" id="2147483648" r:id="R8756cb38e6244150"/>
   </p:sldMasterIdLst>
   <p:notesMasterIdLst>
-    <p:notesMasterId xmlns:r="http://schemas.openxmlformats.org/officeDocument/2006/relationships" r:id="R0f9e6d6e52694058"/>
+    <p:notesMasterId xmlns:r="http://schemas.openxmlformats.org/officeDocument/2006/relationships" r:id="Rf7b72a8a4d994181"/>
   </p:notesMasterIdLst>
   <p:sldIdLst>
-    <p:sldId xmlns:r="http://schemas.openxmlformats.org/officeDocument/2006/relationships" id="256" r:id="R772c3792c48d4805"/>
-    <p:sldId xmlns:r="http://schemas.openxmlformats.org/officeDocument/2006/relationships" id="257" r:id="R615ea62bb2dc4a19"/>
-    <p:sldId xmlns:r="http://schemas.openxmlformats.org/officeDocument/2006/relationships" id="258" r:id="R554fc44338804575"/>
-    <p:sldId xmlns:r="http://schemas.openxmlformats.org/officeDocument/2006/relationships" id="259" r:id="R11b68acc773b4423"/>
-    <p:sldId xmlns:r="http://schemas.openxmlformats.org/officeDocument/2006/relationships" id="260" r:id="R30e2e87c450b4067"/>
-    <p:sldId xmlns:r="http://schemas.openxmlformats.org/officeDocument/2006/relationships" id="261" r:id="Ra0f9fb6fb0e04563"/>
-    <p:sldId xmlns:r="http://schemas.openxmlformats.org/officeDocument/2006/relationships" id="262" r:id="R98ceb4985e894cf0"/>
-    <p:sldId xmlns:r="http://schemas.openxmlformats.org/officeDocument/2006/relationships" id="263" r:id="R15faebe9c5b14f8b"/>
-    <p:sldId xmlns:r="http://schemas.openxmlformats.org/officeDocument/2006/relationships" id="264" r:id="Rb1b277a424c84044"/>
+    <p:sldId xmlns:r="http://schemas.openxmlformats.org/officeDocument/2006/relationships" id="256" r:id="R03060c3083f94db9"/>
+    <p:sldId xmlns:r="http://schemas.openxmlformats.org/officeDocument/2006/relationships" id="257" r:id="R7e6957c424a2415c"/>
+    <p:sldId xmlns:r="http://schemas.openxmlformats.org/officeDocument/2006/relationships" id="258" r:id="Rd2bcfcde3c3441f7"/>
+    <p:sldId xmlns:r="http://schemas.openxmlformats.org/officeDocument/2006/relationships" id="259" r:id="R3e28acdc665e4c79"/>
+    <p:sldId xmlns:r="http://schemas.openxmlformats.org/officeDocument/2006/relationships" id="260" r:id="Rf7f30bf1bb494705"/>
+    <p:sldId xmlns:r="http://schemas.openxmlformats.org/officeDocument/2006/relationships" id="261" r:id="R8af68463ebf641f7"/>
+    <p:sldId xmlns:r="http://schemas.openxmlformats.org/officeDocument/2006/relationships" id="262" r:id="R069f10a14bc74b2f"/>
+    <p:sldId xmlns:r="http://schemas.openxmlformats.org/officeDocument/2006/relationships" id="263" r:id="Rcfbce48688df46a2"/>
+    <p:sldId xmlns:r="http://schemas.openxmlformats.org/officeDocument/2006/relationships" id="264" r:id="Rb10251081e2f48e2"/>
   </p:sldIdLst>
   <p:sldSz cx="12192000" cy="6858000"/>
   <p:notesSz cx="6858000" cy="9144000"/>
   <p:embeddedFontLst>
     <p:embeddedFont>
       <p:font typeface="JetBrains Mono"/>
-      <p:regular xmlns:r="http://schemas.openxmlformats.org/officeDocument/2006/relationships" r:id="Rebaeede2b58c4807"/>
+      <p:regular xmlns:r="http://schemas.openxmlformats.org/officeDocument/2006/relationships" r:id="Rae711756b81d4fa3"/>
     </p:embeddedFont>
   </p:embeddedFontLst>
 </p:presentation>
@@ -1071,7 +1071,7 @@
           <p:nvPr/>
         </p:nvPicPr>
         <p:blipFill rotWithShape="1">
-          <a:blip xmlns:r="http://schemas.openxmlformats.org/officeDocument/2006/relationships" xmlns:a="http://schemas.openxmlformats.org/drawingml/2006/main" r:embed="R61d60bf175e447a0"/>
+          <a:blip xmlns:r="http://schemas.openxmlformats.org/officeDocument/2006/relationships" xmlns:a="http://schemas.openxmlformats.org/drawingml/2006/main" r:embed="R0c90575219a54e22"/>
           <a:stretch xmlns:a="http://schemas.openxmlformats.org/drawingml/2006/main"/>
         </p:blipFill>
         <p:spPr>
@@ -1451,7 +1451,7 @@
           <p:nvPr/>
         </p:nvPicPr>
         <p:blipFill rotWithShape="1">
-          <a:blip xmlns:r="http://schemas.openxmlformats.org/officeDocument/2006/relationships" xmlns:a="http://schemas.openxmlformats.org/drawingml/2006/main" r:embed="R01659345d2544ce2">
+          <a:blip xmlns:r="http://schemas.openxmlformats.org/officeDocument/2006/relationships" xmlns:a="http://schemas.openxmlformats.org/drawingml/2006/main" r:embed="R69aed24030264aa0">
             <a:alphaModFix amt="28000"/>
           </a:blip>
           <a:stretch xmlns:a="http://schemas.openxmlformats.org/drawingml/2006/main"/>
@@ -1664,7 +1664,7 @@
           <p:nvPr/>
         </p:nvPicPr>
         <p:blipFill rotWithShape="1">
-          <a:blip xmlns:r="http://schemas.openxmlformats.org/officeDocument/2006/relationships" xmlns:a="http://schemas.openxmlformats.org/drawingml/2006/main" r:embed="Rc2664afff8c04521">
+          <a:blip xmlns:r="http://schemas.openxmlformats.org/officeDocument/2006/relationships" xmlns:a="http://schemas.openxmlformats.org/drawingml/2006/main" r:embed="R5a171911b0d74c72">
             <a:alphaModFix amt="28000"/>
           </a:blip>
           <a:stretch xmlns:a="http://schemas.openxmlformats.org/drawingml/2006/main"/>
@@ -1899,7 +1899,7 @@
           <p:nvPr/>
         </p:nvPicPr>
         <p:blipFill rotWithShape="1">
-          <a:blip xmlns:r="http://schemas.openxmlformats.org/officeDocument/2006/relationships" xmlns:a="http://schemas.openxmlformats.org/drawingml/2006/main" r:embed="Raa74e6a9abbd4b7a">
+          <a:blip xmlns:r="http://schemas.openxmlformats.org/officeDocument/2006/relationships" xmlns:a="http://schemas.openxmlformats.org/drawingml/2006/main" r:embed="R65d86f9292c74f0f">
             <a:alphaModFix amt="28000"/>
           </a:blip>
           <a:stretch xmlns:a="http://schemas.openxmlformats.org/drawingml/2006/main"/>
@@ -2176,7 +2176,7 @@
           <p:nvPr/>
         </p:nvPicPr>
         <p:blipFill rotWithShape="1">
-          <a:blip xmlns:r="http://schemas.openxmlformats.org/officeDocument/2006/relationships" xmlns:a="http://schemas.openxmlformats.org/drawingml/2006/main" r:embed="Rd2d9ae5c29d946c6">
+          <a:blip xmlns:r="http://schemas.openxmlformats.org/officeDocument/2006/relationships" xmlns:a="http://schemas.openxmlformats.org/drawingml/2006/main" r:embed="Rfd2a73a8791e497a">
             <a:alphaModFix amt="28000"/>
           </a:blip>
           <a:stretch xmlns:a="http://schemas.openxmlformats.org/drawingml/2006/main"/>
@@ -2451,7 +2451,7 @@
           <p:nvPr/>
         </p:nvPicPr>
         <p:blipFill rotWithShape="1">
-          <a:blip xmlns:r="http://schemas.openxmlformats.org/officeDocument/2006/relationships" xmlns:a="http://schemas.openxmlformats.org/drawingml/2006/main" r:embed="Rd6f0528d99744ca3">
+          <a:blip xmlns:r="http://schemas.openxmlformats.org/officeDocument/2006/relationships" xmlns:a="http://schemas.openxmlformats.org/drawingml/2006/main" r:embed="Rb0fd0dcf43d34ba6">
             <a:alphaModFix amt="28000"/>
           </a:blip>
           <a:stretch xmlns:a="http://schemas.openxmlformats.org/drawingml/2006/main"/>
@@ -2875,7 +2875,7 @@
           <p:nvPr/>
         </p:nvPicPr>
         <p:blipFill rotWithShape="1">
-          <a:blip xmlns:r="http://schemas.openxmlformats.org/officeDocument/2006/relationships" xmlns:a="http://schemas.openxmlformats.org/drawingml/2006/main" r:embed="R24a939f55cb6455f">
+          <a:blip xmlns:r="http://schemas.openxmlformats.org/officeDocument/2006/relationships" xmlns:a="http://schemas.openxmlformats.org/drawingml/2006/main" r:embed="R93516908a6e742d8">
             <a:alphaModFix amt="28000"/>
           </a:blip>
           <a:stretch xmlns:a="http://schemas.openxmlformats.org/drawingml/2006/main"/>
@@ -3016,7 +3016,7 @@
           <p:nvPr/>
         </p:nvPicPr>
         <p:blipFill rotWithShape="1">
-          <a:blip xmlns:r="http://schemas.openxmlformats.org/officeDocument/2006/relationships" xmlns:a="http://schemas.openxmlformats.org/drawingml/2006/main" r:embed="R7e28615456a545cf">
+          <a:blip xmlns:r="http://schemas.openxmlformats.org/officeDocument/2006/relationships" xmlns:a="http://schemas.openxmlformats.org/drawingml/2006/main" r:embed="R3fe4536b471c4df6">
             <a:alphaModFix amt="28000"/>
           </a:blip>
           <a:stretch xmlns:a="http://schemas.openxmlformats.org/drawingml/2006/main"/>
@@ -3130,7 +3130,7 @@
           <p:nvPr/>
         </p:nvPicPr>
         <p:blipFill rotWithShape="1">
-          <a:blip xmlns:r="http://schemas.openxmlformats.org/officeDocument/2006/relationships" xmlns:a="http://schemas.openxmlformats.org/drawingml/2006/main" r:embed="Rbbe08f8fec79494e">
+          <a:blip xmlns:r="http://schemas.openxmlformats.org/officeDocument/2006/relationships" xmlns:a="http://schemas.openxmlformats.org/drawingml/2006/main" r:embed="R424a81c4f4df4ca3">
             <a:alphaModFix amt="28000"/>
           </a:blip>
           <a:stretch xmlns:a="http://schemas.openxmlformats.org/drawingml/2006/main"/>
@@ -3457,7 +3457,7 @@
           <p:nvPr/>
         </p:nvPicPr>
         <p:blipFill rotWithShape="1">
-          <a:blip xmlns:r="http://schemas.openxmlformats.org/officeDocument/2006/relationships" xmlns:a="http://schemas.openxmlformats.org/drawingml/2006/main" r:embed="R6517758e321e4bc1">
+          <a:blip xmlns:r="http://schemas.openxmlformats.org/officeDocument/2006/relationships" xmlns:a="http://schemas.openxmlformats.org/drawingml/2006/main" r:embed="Re46a902bb2b24187">
             <a:alphaModFix amt="28000"/>
           </a:blip>
           <a:stretch xmlns:a="http://schemas.openxmlformats.org/drawingml/2006/main"/>
@@ -3745,7 +3745,7 @@
           <p:nvPr/>
         </p:nvPicPr>
         <p:blipFill rotWithShape="1">
-          <a:blip xmlns:r="http://schemas.openxmlformats.org/officeDocument/2006/relationships" xmlns:a="http://schemas.openxmlformats.org/drawingml/2006/main" r:embed="Ra289faf09ac14f1d">
+          <a:blip xmlns:r="http://schemas.openxmlformats.org/officeDocument/2006/relationships" xmlns:a="http://schemas.openxmlformats.org/drawingml/2006/main" r:embed="R356049790e934877">
             <a:alphaModFix amt="28000"/>
           </a:blip>
           <a:stretch xmlns:a="http://schemas.openxmlformats.org/drawingml/2006/main"/>
@@ -3982,17 +3982,17 @@
   </p:cSld>
   <p:clrMap bg1="lt1" tx1="dk1" bg2="lt2" tx2="dk2" accent1="accent1" accent2="accent2" accent3="accent3" accent4="accent4" accent5="accent5" accent6="accent6" hlink="hlink" folHlink="folHlink"/>
   <p:sldLayoutIdLst>
-    <p:sldLayoutId xmlns:r="http://schemas.openxmlformats.org/officeDocument/2006/relationships" id="2147483649" r:id="Ra485dcbc00864643"/>
-    <p:sldLayoutId xmlns:r="http://schemas.openxmlformats.org/officeDocument/2006/relationships" id="2147483650" r:id="Rf4fd7393a4824f26"/>
-    <p:sldLayoutId xmlns:r="http://schemas.openxmlformats.org/officeDocument/2006/relationships" id="2147483651" r:id="Re18dc0bd1e424fcd"/>
-    <p:sldLayoutId xmlns:r="http://schemas.openxmlformats.org/officeDocument/2006/relationships" id="2147483652" r:id="Ra99d4c5a83dc478f"/>
-    <p:sldLayoutId xmlns:r="http://schemas.openxmlformats.org/officeDocument/2006/relationships" id="2147483653" r:id="R09ad46374e3e43e7"/>
-    <p:sldLayoutId xmlns:r="http://schemas.openxmlformats.org/officeDocument/2006/relationships" id="2147483654" r:id="R83000ac4f42348eb"/>
-    <p:sldLayoutId xmlns:r="http://schemas.openxmlformats.org/officeDocument/2006/relationships" id="2147483655" r:id="Rb353325f13b14771"/>
-    <p:sldLayoutId xmlns:r="http://schemas.openxmlformats.org/officeDocument/2006/relationships" id="2147483656" r:id="R2e4c1bb0723043d4"/>
-    <p:sldLayoutId xmlns:r="http://schemas.openxmlformats.org/officeDocument/2006/relationships" id="2147483657" r:id="R119f063cb1be4aaa"/>
-    <p:sldLayoutId xmlns:r="http://schemas.openxmlformats.org/officeDocument/2006/relationships" id="2147483658" r:id="Rbf33e3e15e954bda"/>
-    <p:sldLayoutId xmlns:r="http://schemas.openxmlformats.org/officeDocument/2006/relationships" id="2147483659" r:id="R73fcfd81ca934763"/>
+    <p:sldLayoutId xmlns:r="http://schemas.openxmlformats.org/officeDocument/2006/relationships" id="2147483649" r:id="Ra95c35e0bd464d96"/>
+    <p:sldLayoutId xmlns:r="http://schemas.openxmlformats.org/officeDocument/2006/relationships" id="2147483650" r:id="Rbdedc05e4a074959"/>
+    <p:sldLayoutId xmlns:r="http://schemas.openxmlformats.org/officeDocument/2006/relationships" id="2147483651" r:id="R87012d421e1b4060"/>
+    <p:sldLayoutId xmlns:r="http://schemas.openxmlformats.org/officeDocument/2006/relationships" id="2147483652" r:id="Rca58bd0029364179"/>
+    <p:sldLayoutId xmlns:r="http://schemas.openxmlformats.org/officeDocument/2006/relationships" id="2147483653" r:id="R7c86d7dbac5e41fa"/>
+    <p:sldLayoutId xmlns:r="http://schemas.openxmlformats.org/officeDocument/2006/relationships" id="2147483654" r:id="R171760cd3739402a"/>
+    <p:sldLayoutId xmlns:r="http://schemas.openxmlformats.org/officeDocument/2006/relationships" id="2147483655" r:id="R9270c567deb04ae4"/>
+    <p:sldLayoutId xmlns:r="http://schemas.openxmlformats.org/officeDocument/2006/relationships" id="2147483656" r:id="R930149c044174cc8"/>
+    <p:sldLayoutId xmlns:r="http://schemas.openxmlformats.org/officeDocument/2006/relationships" id="2147483657" r:id="Rc3e0ffb375e74087"/>
+    <p:sldLayoutId xmlns:r="http://schemas.openxmlformats.org/officeDocument/2006/relationships" id="2147483658" r:id="Rbd1d287ca9ef4857"/>
+    <p:sldLayoutId xmlns:r="http://schemas.openxmlformats.org/officeDocument/2006/relationships" id="2147483659" r:id="R49ea6bcb3c474b5f"/>
   </p:sldLayoutIdLst>
   <p:hf hdr="0" ftr="0" dt="0"/>
   <p:txStyles>
@@ -6953,18 +6953,18 @@
                 <a:ea typeface="Calibri"/>
                 <a:cs typeface="Calibri"/>
               </a:rPr>
-              <a:t>Prepare the starter for a weekend trip by replacing the initial </a:t>
+              <a:t>Add </a:t>
             </a:r>
             <a:r>
               <a:rPr sz="2400" b="0">
                 <a:solidFill>
-                  <a:srgbClr val="1750EB"/>
-                </a:solidFill>
-                <a:latin typeface="JetBrains Mono"/>
-                <a:ea typeface="JetBrains Mono"/>
-                <a:cs typeface="JetBrains Mono"/>
-              </a:rPr>
-              <a:t>list</a:t>
+                  <a:srgbClr val="067D17"/>
+                </a:solidFill>
+                <a:latin typeface="JetBrains Mono"/>
+                <a:ea typeface="JetBrains Mono"/>
+                <a:cs typeface="JetBrains Mono"/>
+              </a:rPr>
+              <a:t>"snacks"</a:t>
             </a:r>
             <a:r>
               <a:rPr sz="2400" b="0">
@@ -6975,7 +6975,7 @@
                 <a:ea typeface="Calibri"/>
                 <a:cs typeface="Calibri"/>
               </a:rPr>
-              <a:t> with three useful items. The user's extra item must still be appended and visible in the final </a:t>
+              <a:t> as the third item in [packing_list]. Keep the input and </a:t>
             </a:r>
             <a:r>
               <a:rPr sz="2400" b="0">
@@ -6986,7 +6986,51 @@
                 <a:ea typeface="JetBrains Mono"/>
                 <a:cs typeface="JetBrains Mono"/>
               </a:rPr>
-              <a:t>list</a:t>
+              <a:t>append()</a:t>
+            </a:r>
+            <a:r>
+              <a:rPr sz="2400" b="0">
+                <a:solidFill>
+                  <a:srgbClr val="080808"/>
+                </a:solidFill>
+                <a:latin typeface="Calibri"/>
+                <a:ea typeface="Calibri"/>
+                <a:cs typeface="Calibri"/>
+              </a:rPr>
+              <a:t> lines so the user's item is added after it. Test the input </a:t>
+            </a:r>
+            <a:r>
+              <a:rPr sz="2400" b="0">
+                <a:solidFill>
+                  <a:srgbClr val="067D17"/>
+                </a:solidFill>
+                <a:latin typeface="JetBrains Mono"/>
+                <a:ea typeface="JetBrains Mono"/>
+                <a:cs typeface="JetBrains Mono"/>
+              </a:rPr>
+              <a:t>"coat"</a:t>
+            </a:r>
+            <a:r>
+              <a:rPr sz="2400" b="0">
+                <a:solidFill>
+                  <a:srgbClr val="080808"/>
+                </a:solidFill>
+                <a:latin typeface="Calibri"/>
+                <a:ea typeface="Calibri"/>
+                <a:cs typeface="Calibri"/>
+              </a:rPr>
+              <a:t>; display </a:t>
+            </a:r>
+            <a:r>
+              <a:rPr sz="2400" b="0">
+                <a:solidFill>
+                  <a:srgbClr val="067D17"/>
+                </a:solidFill>
+                <a:latin typeface="JetBrains Mono"/>
+                <a:ea typeface="JetBrains Mono"/>
+                <a:cs typeface="JetBrains Mono"/>
+              </a:rPr>
+              <a:t>"Packing list: ['water', 'map', 'snacks', 'coat']"</a:t>
             </a:r>
             <a:r>
               <a:rPr sz="2400" b="0">
@@ -7589,18 +7633,18 @@
                 <a:ea typeface="Calibri"/>
                 <a:cs typeface="Calibri"/>
               </a:rPr>
-              <a:t>Ask for a second item and append it to the </a:t>
+              <a:t>Ask for the first item and store it in [item], then append it to [packing_list]. Ask for another item and store it in [another_item], then append that item too. Test </a:t>
             </a:r>
             <a:r>
               <a:rPr sz="2400" b="0">
                 <a:solidFill>
-                  <a:srgbClr val="1750EB"/>
-                </a:solidFill>
-                <a:latin typeface="JetBrains Mono"/>
-                <a:ea typeface="JetBrains Mono"/>
-                <a:cs typeface="JetBrains Mono"/>
-              </a:rPr>
-              <a:t>list</a:t>
+                  <a:srgbClr val="067D17"/>
+                </a:solidFill>
+                <a:latin typeface="JetBrains Mono"/>
+                <a:ea typeface="JetBrains Mono"/>
+                <a:cs typeface="JetBrains Mono"/>
+              </a:rPr>
+              <a:t>"coat"</a:t>
             </a:r>
             <a:r>
               <a:rPr sz="2400" b="0">
@@ -7611,7 +7655,51 @@
                 <a:ea typeface="Calibri"/>
                 <a:cs typeface="Calibri"/>
               </a:rPr>
-              <a:t>. Display all four items.</a:t>
+              <a:t> and </a:t>
+            </a:r>
+            <a:r>
+              <a:rPr sz="2400" b="0">
+                <a:solidFill>
+                  <a:srgbClr val="067D17"/>
+                </a:solidFill>
+                <a:latin typeface="JetBrains Mono"/>
+                <a:ea typeface="JetBrains Mono"/>
+                <a:cs typeface="JetBrains Mono"/>
+              </a:rPr>
+              <a:t>"torch"</a:t>
+            </a:r>
+            <a:r>
+              <a:rPr sz="2400" b="0">
+                <a:solidFill>
+                  <a:srgbClr val="080808"/>
+                </a:solidFill>
+                <a:latin typeface="Calibri"/>
+                <a:ea typeface="Calibri"/>
+                <a:cs typeface="Calibri"/>
+              </a:rPr>
+              <a:t>; display </a:t>
+            </a:r>
+            <a:r>
+              <a:rPr sz="2400" b="0">
+                <a:solidFill>
+                  <a:srgbClr val="067D17"/>
+                </a:solidFill>
+                <a:latin typeface="JetBrains Mono"/>
+                <a:ea typeface="JetBrains Mono"/>
+                <a:cs typeface="JetBrains Mono"/>
+              </a:rPr>
+              <a:t>"Packing list: ['water', 'map', 'coat', 'torch']"</a:t>
+            </a:r>
+            <a:r>
+              <a:rPr sz="2400" b="0">
+                <a:solidFill>
+                  <a:srgbClr val="080808"/>
+                </a:solidFill>
+                <a:latin typeface="Calibri"/>
+                <a:ea typeface="Calibri"/>
+                <a:cs typeface="Calibri"/>
+              </a:rPr>
+              <a:t>.</a:t>
             </a:r>
           </a:p>
         </p:txBody>
@@ -8184,7 +8272,7 @@
         </p:spPr>
         <p:txBody>
           <a:bodyPr xmlns:a="http://schemas.openxmlformats.org/drawingml/2006/main">
-            <a:normAutofit fontScale="100000"/>
+            <a:normAutofit fontScale="94208"/>
           </a:bodyPr>
           <a:lstStyle xmlns:a="http://schemas.openxmlformats.org/drawingml/2006/main"/>
           <a:p xmlns:a="http://schemas.openxmlformats.org/drawingml/2006/main">
@@ -8203,18 +8291,18 @@
                 <a:ea typeface="Calibri"/>
                 <a:cs typeface="Calibri"/>
               </a:rPr>
-              <a:t>Make a movie-night checklist. Start with two items of your choice, ask the user for a third, append it, and display the finished </a:t>
+              <a:t>Store </a:t>
             </a:r>
             <a:r>
               <a:rPr sz="2400" b="0">
                 <a:solidFill>
-                  <a:srgbClr val="1750EB"/>
-                </a:solidFill>
-                <a:latin typeface="JetBrains Mono"/>
-                <a:ea typeface="JetBrains Mono"/>
-                <a:cs typeface="JetBrains Mono"/>
-              </a:rPr>
-              <a:t>list</a:t>
+                  <a:srgbClr val="067D17"/>
+                </a:solidFill>
+                <a:latin typeface="JetBrains Mono"/>
+                <a:ea typeface="JetBrains Mono"/>
+                <a:cs typeface="JetBrains Mono"/>
+              </a:rPr>
+              <a:t>"film"</a:t>
             </a:r>
             <a:r>
               <a:rPr sz="2400" b="0">
@@ -8225,7 +8313,139 @@
                 <a:ea typeface="Calibri"/>
                 <a:cs typeface="Calibri"/>
               </a:rPr>
-              <a:t> with a clear heading.</a:t>
+              <a:t> and </a:t>
+            </a:r>
+            <a:r>
+              <a:rPr sz="2400" b="0">
+                <a:solidFill>
+                  <a:srgbClr val="067D17"/>
+                </a:solidFill>
+                <a:latin typeface="JetBrains Mono"/>
+                <a:ea typeface="JetBrains Mono"/>
+                <a:cs typeface="JetBrains Mono"/>
+              </a:rPr>
+              <a:t>"popcorn"</a:t>
+            </a:r>
+            <a:r>
+              <a:rPr sz="2400" b="0">
+                <a:solidFill>
+                  <a:srgbClr val="080808"/>
+                </a:solidFill>
+                <a:latin typeface="Calibri"/>
+                <a:ea typeface="Calibri"/>
+                <a:cs typeface="Calibri"/>
+              </a:rPr>
+              <a:t> in a </a:t>
+            </a:r>
+            <a:r>
+              <a:rPr sz="2400" b="0">
+                <a:solidFill>
+                  <a:srgbClr val="1750EB"/>
+                </a:solidFill>
+                <a:latin typeface="JetBrains Mono"/>
+                <a:ea typeface="JetBrains Mono"/>
+                <a:cs typeface="JetBrains Mono"/>
+              </a:rPr>
+              <a:t>list</a:t>
+            </a:r>
+            <a:r>
+              <a:rPr sz="2400" b="0">
+                <a:solidFill>
+                  <a:srgbClr val="080808"/>
+                </a:solidFill>
+                <a:latin typeface="Calibri"/>
+                <a:ea typeface="Calibri"/>
+                <a:cs typeface="Calibri"/>
+              </a:rPr>
+              <a:t> called [movie_night]. Ask for another item and store it in [item]. Append [item] to [movie_night], then display </a:t>
+            </a:r>
+            <a:r>
+              <a:rPr sz="2400" b="0">
+                <a:solidFill>
+                  <a:srgbClr val="067D17"/>
+                </a:solidFill>
+                <a:latin typeface="JetBrains Mono"/>
+                <a:ea typeface="JetBrains Mono"/>
+                <a:cs typeface="JetBrains Mono"/>
+              </a:rPr>
+              <a:t>"Movie-night checklist:"</a:t>
+            </a:r>
+            <a:r>
+              <a:rPr sz="2400" b="0">
+                <a:solidFill>
+                  <a:srgbClr val="080808"/>
+                </a:solidFill>
+                <a:latin typeface="Calibri"/>
+                <a:ea typeface="Calibri"/>
+                <a:cs typeface="Calibri"/>
+              </a:rPr>
+              <a:t> followed by the </a:t>
+            </a:r>
+            <a:r>
+              <a:rPr sz="2400" b="0">
+                <a:solidFill>
+                  <a:srgbClr val="1750EB"/>
+                </a:solidFill>
+                <a:latin typeface="JetBrains Mono"/>
+                <a:ea typeface="JetBrains Mono"/>
+                <a:cs typeface="JetBrains Mono"/>
+              </a:rPr>
+              <a:t>list</a:t>
+            </a:r>
+            <a:r>
+              <a:rPr sz="2400" b="0">
+                <a:solidFill>
+                  <a:srgbClr val="080808"/>
+                </a:solidFill>
+                <a:latin typeface="Calibri"/>
+                <a:ea typeface="Calibri"/>
+                <a:cs typeface="Calibri"/>
+              </a:rPr>
+              <a:t>. Test </a:t>
+            </a:r>
+            <a:r>
+              <a:rPr sz="2400" b="0">
+                <a:solidFill>
+                  <a:srgbClr val="067D17"/>
+                </a:solidFill>
+                <a:latin typeface="JetBrains Mono"/>
+                <a:ea typeface="JetBrains Mono"/>
+                <a:cs typeface="JetBrains Mono"/>
+              </a:rPr>
+              <a:t>"tickets"</a:t>
+            </a:r>
+            <a:r>
+              <a:rPr sz="2400" b="0">
+                <a:solidFill>
+                  <a:srgbClr val="080808"/>
+                </a:solidFill>
+                <a:latin typeface="Calibri"/>
+                <a:ea typeface="Calibri"/>
+                <a:cs typeface="Calibri"/>
+              </a:rPr>
+              <a:t>; display </a:t>
+            </a:r>
+            <a:r>
+              <a:rPr sz="2400" b="0">
+                <a:solidFill>
+                  <a:srgbClr val="067D17"/>
+                </a:solidFill>
+                <a:latin typeface="JetBrains Mono"/>
+                <a:ea typeface="JetBrains Mono"/>
+                <a:cs typeface="JetBrains Mono"/>
+              </a:rPr>
+              <a:t>"Movie-night checklist: ['film', 'popcorn', 'tickets']"</a:t>
+            </a:r>
+            <a:r>
+              <a:rPr sz="2400" b="0">
+                <a:solidFill>
+                  <a:srgbClr val="080808"/>
+                </a:solidFill>
+                <a:latin typeface="Calibri"/>
+                <a:ea typeface="Calibri"/>
+                <a:cs typeface="Calibri"/>
+              </a:rPr>
+              <a:t>.</a:t>
             </a:r>
           </a:p>
         </p:txBody>

--- a/Mapped Curriculum Lessons/Grade 7/Lesson 17 - Lists/Lists - Slides.pptx
+++ b/Mapped Curriculum Lessons/Grade 7/Lesson 17 - Lists/Lists - Slides.pptx
@@ -2,28 +2,28 @@
 <file path=ppt/presentation.xml><?xml version="1.0" encoding="utf-8"?>
 <p:presentation xmlns:p="http://schemas.openxmlformats.org/presentationml/2006/main" embedTrueTypeFonts="1" saveSubsetFonts="0">
   <p:sldMasterIdLst>
-    <p:sldMasterId xmlns:r="http://schemas.openxmlformats.org/officeDocument/2006/relationships" id="2147483648" r:id="R8756cb38e6244150"/>
+    <p:sldMasterId xmlns:r="http://schemas.openxmlformats.org/officeDocument/2006/relationships" id="2147483648" r:id="R38c0a54289a84387"/>
   </p:sldMasterIdLst>
   <p:notesMasterIdLst>
-    <p:notesMasterId xmlns:r="http://schemas.openxmlformats.org/officeDocument/2006/relationships" r:id="Rf7b72a8a4d994181"/>
+    <p:notesMasterId xmlns:r="http://schemas.openxmlformats.org/officeDocument/2006/relationships" r:id="R8c4c7edd07bd43af"/>
   </p:notesMasterIdLst>
   <p:sldIdLst>
-    <p:sldId xmlns:r="http://schemas.openxmlformats.org/officeDocument/2006/relationships" id="256" r:id="R03060c3083f94db9"/>
-    <p:sldId xmlns:r="http://schemas.openxmlformats.org/officeDocument/2006/relationships" id="257" r:id="R7e6957c424a2415c"/>
-    <p:sldId xmlns:r="http://schemas.openxmlformats.org/officeDocument/2006/relationships" id="258" r:id="Rd2bcfcde3c3441f7"/>
-    <p:sldId xmlns:r="http://schemas.openxmlformats.org/officeDocument/2006/relationships" id="259" r:id="R3e28acdc665e4c79"/>
-    <p:sldId xmlns:r="http://schemas.openxmlformats.org/officeDocument/2006/relationships" id="260" r:id="Rf7f30bf1bb494705"/>
-    <p:sldId xmlns:r="http://schemas.openxmlformats.org/officeDocument/2006/relationships" id="261" r:id="R8af68463ebf641f7"/>
-    <p:sldId xmlns:r="http://schemas.openxmlformats.org/officeDocument/2006/relationships" id="262" r:id="R069f10a14bc74b2f"/>
-    <p:sldId xmlns:r="http://schemas.openxmlformats.org/officeDocument/2006/relationships" id="263" r:id="Rcfbce48688df46a2"/>
-    <p:sldId xmlns:r="http://schemas.openxmlformats.org/officeDocument/2006/relationships" id="264" r:id="Rb10251081e2f48e2"/>
+    <p:sldId xmlns:r="http://schemas.openxmlformats.org/officeDocument/2006/relationships" id="256" r:id="R8bab4309d06646f0"/>
+    <p:sldId xmlns:r="http://schemas.openxmlformats.org/officeDocument/2006/relationships" id="257" r:id="R4db78d544a554b28"/>
+    <p:sldId xmlns:r="http://schemas.openxmlformats.org/officeDocument/2006/relationships" id="258" r:id="Re406866faf5449b1"/>
+    <p:sldId xmlns:r="http://schemas.openxmlformats.org/officeDocument/2006/relationships" id="259" r:id="Rf2708ccbe4f44cdb"/>
+    <p:sldId xmlns:r="http://schemas.openxmlformats.org/officeDocument/2006/relationships" id="260" r:id="R2c8b502cccd54d30"/>
+    <p:sldId xmlns:r="http://schemas.openxmlformats.org/officeDocument/2006/relationships" id="261" r:id="Re251320cd99b4728"/>
+    <p:sldId xmlns:r="http://schemas.openxmlformats.org/officeDocument/2006/relationships" id="262" r:id="Rfff0cbdd16d4482e"/>
+    <p:sldId xmlns:r="http://schemas.openxmlformats.org/officeDocument/2006/relationships" id="263" r:id="R2c2bff0897a9480a"/>
+    <p:sldId xmlns:r="http://schemas.openxmlformats.org/officeDocument/2006/relationships" id="264" r:id="Rc27c0592602349b4"/>
   </p:sldIdLst>
   <p:sldSz cx="12192000" cy="6858000"/>
   <p:notesSz cx="6858000" cy="9144000"/>
   <p:embeddedFontLst>
     <p:embeddedFont>
       <p:font typeface="JetBrains Mono"/>
-      <p:regular xmlns:r="http://schemas.openxmlformats.org/officeDocument/2006/relationships" r:id="Rae711756b81d4fa3"/>
+      <p:regular xmlns:r="http://schemas.openxmlformats.org/officeDocument/2006/relationships" r:id="R7cfc2b56623742fd"/>
     </p:embeddedFont>
   </p:embeddedFontLst>
 </p:presentation>
@@ -1071,7 +1071,7 @@
           <p:nvPr/>
         </p:nvPicPr>
         <p:blipFill rotWithShape="1">
-          <a:blip xmlns:r="http://schemas.openxmlformats.org/officeDocument/2006/relationships" xmlns:a="http://schemas.openxmlformats.org/drawingml/2006/main" r:embed="R0c90575219a54e22"/>
+          <a:blip xmlns:r="http://schemas.openxmlformats.org/officeDocument/2006/relationships" xmlns:a="http://schemas.openxmlformats.org/drawingml/2006/main" r:embed="R6a3f0a191aa744af"/>
           <a:stretch xmlns:a="http://schemas.openxmlformats.org/drawingml/2006/main"/>
         </p:blipFill>
         <p:spPr>
@@ -1451,7 +1451,7 @@
           <p:nvPr/>
         </p:nvPicPr>
         <p:blipFill rotWithShape="1">
-          <a:blip xmlns:r="http://schemas.openxmlformats.org/officeDocument/2006/relationships" xmlns:a="http://schemas.openxmlformats.org/drawingml/2006/main" r:embed="R69aed24030264aa0">
+          <a:blip xmlns:r="http://schemas.openxmlformats.org/officeDocument/2006/relationships" xmlns:a="http://schemas.openxmlformats.org/drawingml/2006/main" r:embed="R32536a3fa3c74685">
             <a:alphaModFix amt="28000"/>
           </a:blip>
           <a:stretch xmlns:a="http://schemas.openxmlformats.org/drawingml/2006/main"/>
@@ -1664,7 +1664,7 @@
           <p:nvPr/>
         </p:nvPicPr>
         <p:blipFill rotWithShape="1">
-          <a:blip xmlns:r="http://schemas.openxmlformats.org/officeDocument/2006/relationships" xmlns:a="http://schemas.openxmlformats.org/drawingml/2006/main" r:embed="R5a171911b0d74c72">
+          <a:blip xmlns:r="http://schemas.openxmlformats.org/officeDocument/2006/relationships" xmlns:a="http://schemas.openxmlformats.org/drawingml/2006/main" r:embed="R00a6e2e081df4b86">
             <a:alphaModFix amt="28000"/>
           </a:blip>
           <a:stretch xmlns:a="http://schemas.openxmlformats.org/drawingml/2006/main"/>
@@ -1899,7 +1899,7 @@
           <p:nvPr/>
         </p:nvPicPr>
         <p:blipFill rotWithShape="1">
-          <a:blip xmlns:r="http://schemas.openxmlformats.org/officeDocument/2006/relationships" xmlns:a="http://schemas.openxmlformats.org/drawingml/2006/main" r:embed="R65d86f9292c74f0f">
+          <a:blip xmlns:r="http://schemas.openxmlformats.org/officeDocument/2006/relationships" xmlns:a="http://schemas.openxmlformats.org/drawingml/2006/main" r:embed="R61594c6732ce40c2">
             <a:alphaModFix amt="28000"/>
           </a:blip>
           <a:stretch xmlns:a="http://schemas.openxmlformats.org/drawingml/2006/main"/>
@@ -2176,7 +2176,7 @@
           <p:nvPr/>
         </p:nvPicPr>
         <p:blipFill rotWithShape="1">
-          <a:blip xmlns:r="http://schemas.openxmlformats.org/officeDocument/2006/relationships" xmlns:a="http://schemas.openxmlformats.org/drawingml/2006/main" r:embed="Rfd2a73a8791e497a">
+          <a:blip xmlns:r="http://schemas.openxmlformats.org/officeDocument/2006/relationships" xmlns:a="http://schemas.openxmlformats.org/drawingml/2006/main" r:embed="Rc2af33b7f1404df7">
             <a:alphaModFix amt="28000"/>
           </a:blip>
           <a:stretch xmlns:a="http://schemas.openxmlformats.org/drawingml/2006/main"/>
@@ -2451,7 +2451,7 @@
           <p:nvPr/>
         </p:nvPicPr>
         <p:blipFill rotWithShape="1">
-          <a:blip xmlns:r="http://schemas.openxmlformats.org/officeDocument/2006/relationships" xmlns:a="http://schemas.openxmlformats.org/drawingml/2006/main" r:embed="Rb0fd0dcf43d34ba6">
+          <a:blip xmlns:r="http://schemas.openxmlformats.org/officeDocument/2006/relationships" xmlns:a="http://schemas.openxmlformats.org/drawingml/2006/main" r:embed="R46afecf597a64505">
             <a:alphaModFix amt="28000"/>
           </a:blip>
           <a:stretch xmlns:a="http://schemas.openxmlformats.org/drawingml/2006/main"/>
@@ -2875,7 +2875,7 @@
           <p:nvPr/>
         </p:nvPicPr>
         <p:blipFill rotWithShape="1">
-          <a:blip xmlns:r="http://schemas.openxmlformats.org/officeDocument/2006/relationships" xmlns:a="http://schemas.openxmlformats.org/drawingml/2006/main" r:embed="R93516908a6e742d8">
+          <a:blip xmlns:r="http://schemas.openxmlformats.org/officeDocument/2006/relationships" xmlns:a="http://schemas.openxmlformats.org/drawingml/2006/main" r:embed="Rd4ccc9e5f82f4420">
             <a:alphaModFix amt="28000"/>
           </a:blip>
           <a:stretch xmlns:a="http://schemas.openxmlformats.org/drawingml/2006/main"/>
@@ -3016,7 +3016,7 @@
           <p:nvPr/>
         </p:nvPicPr>
         <p:blipFill rotWithShape="1">
-          <a:blip xmlns:r="http://schemas.openxmlformats.org/officeDocument/2006/relationships" xmlns:a="http://schemas.openxmlformats.org/drawingml/2006/main" r:embed="R3fe4536b471c4df6">
+          <a:blip xmlns:r="http://schemas.openxmlformats.org/officeDocument/2006/relationships" xmlns:a="http://schemas.openxmlformats.org/drawingml/2006/main" r:embed="R87adcb345af542d3">
             <a:alphaModFix amt="28000"/>
           </a:blip>
           <a:stretch xmlns:a="http://schemas.openxmlformats.org/drawingml/2006/main"/>
@@ -3130,7 +3130,7 @@
           <p:nvPr/>
         </p:nvPicPr>
         <p:blipFill rotWithShape="1">
-          <a:blip xmlns:r="http://schemas.openxmlformats.org/officeDocument/2006/relationships" xmlns:a="http://schemas.openxmlformats.org/drawingml/2006/main" r:embed="R424a81c4f4df4ca3">
+          <a:blip xmlns:r="http://schemas.openxmlformats.org/officeDocument/2006/relationships" xmlns:a="http://schemas.openxmlformats.org/drawingml/2006/main" r:embed="Rdd7a42488e6541e4">
             <a:alphaModFix amt="28000"/>
           </a:blip>
           <a:stretch xmlns:a="http://schemas.openxmlformats.org/drawingml/2006/main"/>
@@ -3457,7 +3457,7 @@
           <p:nvPr/>
         </p:nvPicPr>
         <p:blipFill rotWithShape="1">
-          <a:blip xmlns:r="http://schemas.openxmlformats.org/officeDocument/2006/relationships" xmlns:a="http://schemas.openxmlformats.org/drawingml/2006/main" r:embed="Re46a902bb2b24187">
+          <a:blip xmlns:r="http://schemas.openxmlformats.org/officeDocument/2006/relationships" xmlns:a="http://schemas.openxmlformats.org/drawingml/2006/main" r:embed="Rd3c48c512d1644d0">
             <a:alphaModFix amt="28000"/>
           </a:blip>
           <a:stretch xmlns:a="http://schemas.openxmlformats.org/drawingml/2006/main"/>
@@ -3745,7 +3745,7 @@
           <p:nvPr/>
         </p:nvPicPr>
         <p:blipFill rotWithShape="1">
-          <a:blip xmlns:r="http://schemas.openxmlformats.org/officeDocument/2006/relationships" xmlns:a="http://schemas.openxmlformats.org/drawingml/2006/main" r:embed="R356049790e934877">
+          <a:blip xmlns:r="http://schemas.openxmlformats.org/officeDocument/2006/relationships" xmlns:a="http://schemas.openxmlformats.org/drawingml/2006/main" r:embed="R87f7bb59ee4147a4">
             <a:alphaModFix amt="28000"/>
           </a:blip>
           <a:stretch xmlns:a="http://schemas.openxmlformats.org/drawingml/2006/main"/>
@@ -3982,17 +3982,17 @@
   </p:cSld>
   <p:clrMap bg1="lt1" tx1="dk1" bg2="lt2" tx2="dk2" accent1="accent1" accent2="accent2" accent3="accent3" accent4="accent4" accent5="accent5" accent6="accent6" hlink="hlink" folHlink="folHlink"/>
   <p:sldLayoutIdLst>
-    <p:sldLayoutId xmlns:r="http://schemas.openxmlformats.org/officeDocument/2006/relationships" id="2147483649" r:id="Ra95c35e0bd464d96"/>
-    <p:sldLayoutId xmlns:r="http://schemas.openxmlformats.org/officeDocument/2006/relationships" id="2147483650" r:id="Rbdedc05e4a074959"/>
-    <p:sldLayoutId xmlns:r="http://schemas.openxmlformats.org/officeDocument/2006/relationships" id="2147483651" r:id="R87012d421e1b4060"/>
-    <p:sldLayoutId xmlns:r="http://schemas.openxmlformats.org/officeDocument/2006/relationships" id="2147483652" r:id="Rca58bd0029364179"/>
-    <p:sldLayoutId xmlns:r="http://schemas.openxmlformats.org/officeDocument/2006/relationships" id="2147483653" r:id="R7c86d7dbac5e41fa"/>
-    <p:sldLayoutId xmlns:r="http://schemas.openxmlformats.org/officeDocument/2006/relationships" id="2147483654" r:id="R171760cd3739402a"/>
-    <p:sldLayoutId xmlns:r="http://schemas.openxmlformats.org/officeDocument/2006/relationships" id="2147483655" r:id="R9270c567deb04ae4"/>
-    <p:sldLayoutId xmlns:r="http://schemas.openxmlformats.org/officeDocument/2006/relationships" id="2147483656" r:id="R930149c044174cc8"/>
-    <p:sldLayoutId xmlns:r="http://schemas.openxmlformats.org/officeDocument/2006/relationships" id="2147483657" r:id="Rc3e0ffb375e74087"/>
-    <p:sldLayoutId xmlns:r="http://schemas.openxmlformats.org/officeDocument/2006/relationships" id="2147483658" r:id="Rbd1d287ca9ef4857"/>
-    <p:sldLayoutId xmlns:r="http://schemas.openxmlformats.org/officeDocument/2006/relationships" id="2147483659" r:id="R49ea6bcb3c474b5f"/>
+    <p:sldLayoutId xmlns:r="http://schemas.openxmlformats.org/officeDocument/2006/relationships" id="2147483649" r:id="Rd38dc9c8777a4b3c"/>
+    <p:sldLayoutId xmlns:r="http://schemas.openxmlformats.org/officeDocument/2006/relationships" id="2147483650" r:id="Raeae5a8acfae4a7a"/>
+    <p:sldLayoutId xmlns:r="http://schemas.openxmlformats.org/officeDocument/2006/relationships" id="2147483651" r:id="R821ed749a560404e"/>
+    <p:sldLayoutId xmlns:r="http://schemas.openxmlformats.org/officeDocument/2006/relationships" id="2147483652" r:id="Ra207b62ac0a74f07"/>
+    <p:sldLayoutId xmlns:r="http://schemas.openxmlformats.org/officeDocument/2006/relationships" id="2147483653" r:id="R4c81c6fc58a044a5"/>
+    <p:sldLayoutId xmlns:r="http://schemas.openxmlformats.org/officeDocument/2006/relationships" id="2147483654" r:id="Rd73b76a10f7b4afb"/>
+    <p:sldLayoutId xmlns:r="http://schemas.openxmlformats.org/officeDocument/2006/relationships" id="2147483655" r:id="R8b63ca220d2c4f71"/>
+    <p:sldLayoutId xmlns:r="http://schemas.openxmlformats.org/officeDocument/2006/relationships" id="2147483656" r:id="Re18076cc2a5c4241"/>
+    <p:sldLayoutId xmlns:r="http://schemas.openxmlformats.org/officeDocument/2006/relationships" id="2147483657" r:id="R2a6b46f1406d41b9"/>
+    <p:sldLayoutId xmlns:r="http://schemas.openxmlformats.org/officeDocument/2006/relationships" id="2147483658" r:id="R495fe2b90b4745e8"/>
+    <p:sldLayoutId xmlns:r="http://schemas.openxmlformats.org/officeDocument/2006/relationships" id="2147483659" r:id="R695d6a304d9746c0"/>
   </p:sldLayoutIdLst>
   <p:hf hdr="0" ftr="0" dt="0"/>
   <p:txStyles>
@@ -6953,10 +6953,10 @@
                 <a:ea typeface="Calibri"/>
                 <a:cs typeface="Calibri"/>
               </a:rPr>
-              <a:t>Add </a:t>
-            </a:r>
-            <a:r>
-              <a:rPr sz="2400" b="0">
+              <a:t>Change the example so it also asks whether the trip is overnight. If the answer is </a:t>
+            </a:r>
+            <a:r>
+              <a:rPr sz="2050" b="0">
                 <a:solidFill>
                   <a:srgbClr val="067D17"/>
                 </a:solidFill>
@@ -6964,7 +6964,7 @@
                 <a:ea typeface="JetBrains Mono"/>
                 <a:cs typeface="JetBrains Mono"/>
               </a:rPr>
-              <a:t>"snacks"</a:t>
+              <a:t>"yes"</a:t>
             </a:r>
             <a:r>
               <a:rPr sz="2400" b="0">
@@ -6975,10 +6975,10 @@
                 <a:ea typeface="Calibri"/>
                 <a:cs typeface="Calibri"/>
               </a:rPr>
-              <a:t> as the third item in [packing_list]. Keep the input and </a:t>
-            </a:r>
-            <a:r>
-              <a:rPr sz="2400" b="0">
+              <a:t>, use </a:t>
+            </a:r>
+            <a:r>
+              <a:rPr sz="2050" b="0">
                 <a:solidFill>
                   <a:srgbClr val="1750EB"/>
                 </a:solidFill>
@@ -6997,10 +6997,10 @@
                 <a:ea typeface="Calibri"/>
                 <a:cs typeface="Calibri"/>
               </a:rPr>
-              <a:t> lines so the user's item is added after it. Test the input </a:t>
-            </a:r>
-            <a:r>
-              <a:rPr sz="2400" b="0">
+              <a:t> to add </a:t>
+            </a:r>
+            <a:r>
+              <a:rPr sz="2050" b="0">
                 <a:solidFill>
                   <a:srgbClr val="067D17"/>
                 </a:solidFill>
@@ -7008,7 +7008,7 @@
                 <a:ea typeface="JetBrains Mono"/>
                 <a:cs typeface="JetBrains Mono"/>
               </a:rPr>
-              <a:t>"coat"</a:t>
+              <a:t>"sleeping bag"</a:t>
             </a:r>
             <a:r>
               <a:rPr sz="2400" b="0">
@@ -7019,18 +7019,87 @@
                 <a:ea typeface="Calibri"/>
                 <a:cs typeface="Calibri"/>
               </a:rPr>
-              <a:t>; display </a:t>
+              <a:t> to </a:t>
+            </a:r>
+            <a:r>
+              <a:rPr sz="2050" b="0">
+                <a:solidFill>
+                  <a:srgbClr val="6A1B9A"/>
+                </a:solidFill>
+                <a:highlight>
+                  <a:srgbClr val="ECEAF4"/>
+                </a:highlight>
+                <a:latin typeface="JetBrains Mono"/>
+                <a:ea typeface="JetBrains Mono"/>
+                <a:cs typeface="JetBrains Mono"/>
+              </a:rPr>
+              <a:t> packing_list </a:t>
             </a:r>
             <a:r>
               <a:rPr sz="2400" b="0">
                 <a:solidFill>
+                  <a:srgbClr val="080808"/>
+                </a:solidFill>
+                <a:latin typeface="Calibri"/>
+                <a:ea typeface="Calibri"/>
+                <a:cs typeface="Calibri"/>
+              </a:rPr>
+              <a:t> before it is displayed. For example, </a:t>
+            </a:r>
+            <a:r>
+              <a:rPr sz="2050" b="0">
+                <a:solidFill>
                   <a:srgbClr val="067D17"/>
                 </a:solidFill>
                 <a:latin typeface="JetBrains Mono"/>
                 <a:ea typeface="JetBrains Mono"/>
                 <a:cs typeface="JetBrains Mono"/>
               </a:rPr>
-              <a:t>"Packing list: ['water', 'map', 'snacks', 'coat']"</a:t>
+              <a:t>"coat"</a:t>
+            </a:r>
+            <a:r>
+              <a:rPr sz="2400" b="0">
+                <a:solidFill>
+                  <a:srgbClr val="080808"/>
+                </a:solidFill>
+                <a:latin typeface="Calibri"/>
+                <a:ea typeface="Calibri"/>
+                <a:cs typeface="Calibri"/>
+              </a:rPr>
+              <a:t> and </a:t>
+            </a:r>
+            <a:r>
+              <a:rPr sz="2050" b="0">
+                <a:solidFill>
+                  <a:srgbClr val="067D17"/>
+                </a:solidFill>
+                <a:latin typeface="JetBrains Mono"/>
+                <a:ea typeface="JetBrains Mono"/>
+                <a:cs typeface="JetBrains Mono"/>
+              </a:rPr>
+              <a:t>"yes"</a:t>
+            </a:r>
+            <a:r>
+              <a:rPr sz="2400" b="0">
+                <a:solidFill>
+                  <a:srgbClr val="080808"/>
+                </a:solidFill>
+                <a:latin typeface="Calibri"/>
+                <a:ea typeface="Calibri"/>
+                <a:cs typeface="Calibri"/>
+              </a:rPr>
+              <a:t> display </a:t>
+            </a:r>
+            <a:r>
+              <a:rPr sz="2050" b="0">
+                <a:solidFill>
+                  <a:srgbClr val="067D17"/>
+                </a:solidFill>
+                <a:latin typeface="JetBrains Mono"/>
+                <a:ea typeface="JetBrains Mono"/>
+                <a:cs typeface="JetBrains Mono"/>
+              </a:rPr>
+              <a:t>"Packing list: ['water', 'map', 'coat', 'sleeping bag']"</a:t>
             </a:r>
             <a:r>
               <a:rPr sz="2400" b="0">
@@ -7633,18 +7702,21 @@
                 <a:ea typeface="Calibri"/>
                 <a:cs typeface="Calibri"/>
               </a:rPr>
-              <a:t>Ask for the first item and store it in [item], then append it to [packing_list]. Ask for another item and store it in [another_item], then append that item too. Test </a:t>
-            </a:r>
-            <a:r>
-              <a:rPr sz="2400" b="0">
-                <a:solidFill>
-                  <a:srgbClr val="067D17"/>
-                </a:solidFill>
-                <a:latin typeface="JetBrains Mono"/>
-                <a:ea typeface="JetBrains Mono"/>
-                <a:cs typeface="JetBrains Mono"/>
-              </a:rPr>
-              <a:t>"coat"</a:t>
+              <a:t>Extend the example so it asks for a second item in </a:t>
+            </a:r>
+            <a:r>
+              <a:rPr sz="2050" b="0">
+                <a:solidFill>
+                  <a:srgbClr val="6A1B9A"/>
+                </a:solidFill>
+                <a:highlight>
+                  <a:srgbClr val="ECEAF4"/>
+                </a:highlight>
+                <a:latin typeface="JetBrains Mono"/>
+                <a:ea typeface="JetBrains Mono"/>
+                <a:cs typeface="JetBrains Mono"/>
+              </a:rPr>
+              <a:t> another_item </a:t>
             </a:r>
             <a:r>
               <a:rPr sz="2400" b="0">
@@ -7655,18 +7727,18 @@
                 <a:ea typeface="Calibri"/>
                 <a:cs typeface="Calibri"/>
               </a:rPr>
-              <a:t> and </a:t>
-            </a:r>
-            <a:r>
-              <a:rPr sz="2400" b="0">
-                <a:solidFill>
-                  <a:srgbClr val="067D17"/>
-                </a:solidFill>
-                <a:latin typeface="JetBrains Mono"/>
-                <a:ea typeface="JetBrains Mono"/>
-                <a:cs typeface="JetBrains Mono"/>
-              </a:rPr>
-              <a:t>"torch"</a:t>
+              <a:t> and uses </a:t>
+            </a:r>
+            <a:r>
+              <a:rPr sz="2050" b="0">
+                <a:solidFill>
+                  <a:srgbClr val="1750EB"/>
+                </a:solidFill>
+                <a:latin typeface="JetBrains Mono"/>
+                <a:ea typeface="JetBrains Mono"/>
+                <a:cs typeface="JetBrains Mono"/>
+              </a:rPr>
+              <a:t>append()</a:t>
             </a:r>
             <a:r>
               <a:rPr sz="2400" b="0">
@@ -7677,10 +7749,54 @@
                 <a:ea typeface="Calibri"/>
                 <a:cs typeface="Calibri"/>
               </a:rPr>
-              <a:t>; display </a:t>
+              <a:t> to add it too. For example, </a:t>
+            </a:r>
+            <a:r>
+              <a:rPr sz="2050" b="0">
+                <a:solidFill>
+                  <a:srgbClr val="067D17"/>
+                </a:solidFill>
+                <a:latin typeface="JetBrains Mono"/>
+                <a:ea typeface="JetBrains Mono"/>
+                <a:cs typeface="JetBrains Mono"/>
+              </a:rPr>
+              <a:t>"coat"</a:t>
             </a:r>
             <a:r>
               <a:rPr sz="2400" b="0">
+                <a:solidFill>
+                  <a:srgbClr val="080808"/>
+                </a:solidFill>
+                <a:latin typeface="Calibri"/>
+                <a:ea typeface="Calibri"/>
+                <a:cs typeface="Calibri"/>
+              </a:rPr>
+              <a:t> and </a:t>
+            </a:r>
+            <a:r>
+              <a:rPr sz="2050" b="0">
+                <a:solidFill>
+                  <a:srgbClr val="067D17"/>
+                </a:solidFill>
+                <a:latin typeface="JetBrains Mono"/>
+                <a:ea typeface="JetBrains Mono"/>
+                <a:cs typeface="JetBrains Mono"/>
+              </a:rPr>
+              <a:t>"torch"</a:t>
+            </a:r>
+            <a:r>
+              <a:rPr sz="2400" b="0">
+                <a:solidFill>
+                  <a:srgbClr val="080808"/>
+                </a:solidFill>
+                <a:latin typeface="Calibri"/>
+                <a:ea typeface="Calibri"/>
+                <a:cs typeface="Calibri"/>
+              </a:rPr>
+              <a:t> display </a:t>
+            </a:r>
+            <a:r>
+              <a:rPr sz="2050" b="0">
                 <a:solidFill>
                   <a:srgbClr val="067D17"/>
                 </a:solidFill>
@@ -8272,7 +8388,7 @@
         </p:spPr>
         <p:txBody>
           <a:bodyPr xmlns:a="http://schemas.openxmlformats.org/drawingml/2006/main">
-            <a:normAutofit fontScale="94208"/>
+            <a:normAutofit fontScale="100000"/>
           </a:bodyPr>
           <a:lstStyle xmlns:a="http://schemas.openxmlformats.org/drawingml/2006/main"/>
           <a:p xmlns:a="http://schemas.openxmlformats.org/drawingml/2006/main">
@@ -8291,18 +8407,18 @@
                 <a:ea typeface="Calibri"/>
                 <a:cs typeface="Calibri"/>
               </a:rPr>
-              <a:t>Store </a:t>
-            </a:r>
-            <a:r>
-              <a:rPr sz="2400" b="0">
-                <a:solidFill>
-                  <a:srgbClr val="067D17"/>
-                </a:solidFill>
-                <a:latin typeface="JetBrains Mono"/>
-                <a:ea typeface="JetBrains Mono"/>
-                <a:cs typeface="JetBrains Mono"/>
-              </a:rPr>
-              <a:t>"film"</a:t>
+              <a:t>Create a guest-</a:t>
+            </a:r>
+            <a:r>
+              <a:rPr sz="2050" b="0">
+                <a:solidFill>
+                  <a:srgbClr val="1750EB"/>
+                </a:solidFill>
+                <a:latin typeface="JetBrains Mono"/>
+                <a:ea typeface="JetBrains Mono"/>
+                <a:cs typeface="JetBrains Mono"/>
+              </a:rPr>
+              <a:t>list</a:t>
             </a:r>
             <a:r>
               <a:rPr sz="2400" b="0">
@@ -8313,18 +8429,18 @@
                 <a:ea typeface="Calibri"/>
                 <a:cs typeface="Calibri"/>
               </a:rPr>
-              <a:t> and </a:t>
-            </a:r>
-            <a:r>
-              <a:rPr sz="2400" b="0">
-                <a:solidFill>
-                  <a:srgbClr val="067D17"/>
-                </a:solidFill>
-                <a:latin typeface="JetBrains Mono"/>
-                <a:ea typeface="JetBrains Mono"/>
-                <a:cs typeface="JetBrains Mono"/>
-              </a:rPr>
-              <a:t>"popcorn"</a:t>
+              <a:t> program. Start with an empty </a:t>
+            </a:r>
+            <a:r>
+              <a:rPr sz="2050" b="0">
+                <a:solidFill>
+                  <a:srgbClr val="1750EB"/>
+                </a:solidFill>
+                <a:latin typeface="JetBrains Mono"/>
+                <a:ea typeface="JetBrains Mono"/>
+                <a:cs typeface="JetBrains Mono"/>
+              </a:rPr>
+              <a:t>list</a:t>
             </a:r>
             <a:r>
               <a:rPr sz="2400" b="0">
@@ -8335,18 +8451,21 @@
                 <a:ea typeface="Calibri"/>
                 <a:cs typeface="Calibri"/>
               </a:rPr>
-              <a:t> in a </a:t>
-            </a:r>
-            <a:r>
-              <a:rPr sz="2400" b="0">
-                <a:solidFill>
-                  <a:srgbClr val="1750EB"/>
-                </a:solidFill>
-                <a:latin typeface="JetBrains Mono"/>
-                <a:ea typeface="JetBrains Mono"/>
-                <a:cs typeface="JetBrains Mono"/>
-              </a:rPr>
-              <a:t>list</a:t>
+              <a:t> called </a:t>
+            </a:r>
+            <a:r>
+              <a:rPr sz="2050" b="0">
+                <a:solidFill>
+                  <a:srgbClr val="6A1B9A"/>
+                </a:solidFill>
+                <a:highlight>
+                  <a:srgbClr val="ECEAF4"/>
+                </a:highlight>
+                <a:latin typeface="JetBrains Mono"/>
+                <a:ea typeface="JetBrains Mono"/>
+                <a:cs typeface="JetBrains Mono"/>
+              </a:rPr>
+              <a:t> guests </a:t>
             </a:r>
             <a:r>
               <a:rPr sz="2400" b="0">
@@ -8357,10 +8476,10 @@
                 <a:ea typeface="Calibri"/>
                 <a:cs typeface="Calibri"/>
               </a:rPr>
-              <a:t> called [movie_night]. Ask for another item and store it in [item]. Append [item] to [movie_night], then display </a:t>
-            </a:r>
-            <a:r>
-              <a:rPr sz="2400" b="0">
+              <a:t>. Ask for three names and append each one. Then ask whether a plus-one is coming; if the answer is </a:t>
+            </a:r>
+            <a:r>
+              <a:rPr sz="2050" b="0">
                 <a:solidFill>
                   <a:srgbClr val="067D17"/>
                 </a:solidFill>
@@ -8368,7 +8487,7 @@
                 <a:ea typeface="JetBrains Mono"/>
                 <a:cs typeface="JetBrains Mono"/>
               </a:rPr>
-              <a:t>"Movie-night checklist:"</a:t>
+              <a:t>"yes"</a:t>
             </a:r>
             <a:r>
               <a:rPr sz="2400" b="0">
@@ -8379,18 +8498,18 @@
                 <a:ea typeface="Calibri"/>
                 <a:cs typeface="Calibri"/>
               </a:rPr>
-              <a:t> followed by the </a:t>
-            </a:r>
-            <a:r>
-              <a:rPr sz="2400" b="0">
-                <a:solidFill>
-                  <a:srgbClr val="1750EB"/>
-                </a:solidFill>
-                <a:latin typeface="JetBrains Mono"/>
-                <a:ea typeface="JetBrains Mono"/>
-                <a:cs typeface="JetBrains Mono"/>
-              </a:rPr>
-              <a:t>list</a:t>
+              <a:t>, append </a:t>
+            </a:r>
+            <a:r>
+              <a:rPr sz="2050" b="0">
+                <a:solidFill>
+                  <a:srgbClr val="067D17"/>
+                </a:solidFill>
+                <a:latin typeface="JetBrains Mono"/>
+                <a:ea typeface="JetBrains Mono"/>
+                <a:cs typeface="JetBrains Mono"/>
+              </a:rPr>
+              <a:t>"Plus one"</a:t>
             </a:r>
             <a:r>
               <a:rPr sz="2400" b="0">
@@ -8401,18 +8520,18 @@
                 <a:ea typeface="Calibri"/>
                 <a:cs typeface="Calibri"/>
               </a:rPr>
-              <a:t>. Test </a:t>
-            </a:r>
-            <a:r>
-              <a:rPr sz="2400" b="0">
-                <a:solidFill>
-                  <a:srgbClr val="067D17"/>
-                </a:solidFill>
-                <a:latin typeface="JetBrains Mono"/>
-                <a:ea typeface="JetBrains Mono"/>
-                <a:cs typeface="JetBrains Mono"/>
-              </a:rPr>
-              <a:t>"tickets"</a:t>
+              <a:t>. Display the </a:t>
+            </a:r>
+            <a:r>
+              <a:rPr sz="2050" b="0">
+                <a:solidFill>
+                  <a:srgbClr val="1750EB"/>
+                </a:solidFill>
+                <a:latin typeface="JetBrains Mono"/>
+                <a:ea typeface="JetBrains Mono"/>
+                <a:cs typeface="JetBrains Mono"/>
+              </a:rPr>
+              <a:t>list</a:t>
             </a:r>
             <a:r>
               <a:rPr sz="2400" b="0">
@@ -8423,10 +8542,10 @@
                 <a:ea typeface="Calibri"/>
                 <a:cs typeface="Calibri"/>
               </a:rPr>
-              <a:t>; display </a:t>
-            </a:r>
-            <a:r>
-              <a:rPr sz="2400" b="0">
+              <a:t> after </a:t>
+            </a:r>
+            <a:r>
+              <a:rPr sz="2050" b="0">
                 <a:solidFill>
                   <a:srgbClr val="067D17"/>
                 </a:solidFill>
@@ -8434,7 +8553,7 @@
                 <a:ea typeface="JetBrains Mono"/>
                 <a:cs typeface="JetBrains Mono"/>
               </a:rPr>
-              <a:t>"Movie-night checklist: ['film', 'popcorn', 'tickets']"</a:t>
+              <a:t>"Guests:"</a:t>
             </a:r>
             <a:r>
               <a:rPr sz="2400" b="0">

--- a/Mapped Curriculum Lessons/Grade 7/Lesson 17 - Lists/Lists - Slides.pptx
+++ b/Mapped Curriculum Lessons/Grade 7/Lesson 17 - Lists/Lists - Slides.pptx
@@ -2,28 +2,28 @@
 <file path=ppt/presentation.xml><?xml version="1.0" encoding="utf-8"?>
 <p:presentation xmlns:p="http://schemas.openxmlformats.org/presentationml/2006/main" embedTrueTypeFonts="1" saveSubsetFonts="0">
   <p:sldMasterIdLst>
-    <p:sldMasterId xmlns:r="http://schemas.openxmlformats.org/officeDocument/2006/relationships" id="2147483648" r:id="R38c0a54289a84387"/>
+    <p:sldMasterId xmlns:r="http://schemas.openxmlformats.org/officeDocument/2006/relationships" id="2147483648" r:id="Rad78f3c42a354c3a"/>
   </p:sldMasterIdLst>
   <p:notesMasterIdLst>
-    <p:notesMasterId xmlns:r="http://schemas.openxmlformats.org/officeDocument/2006/relationships" r:id="R8c4c7edd07bd43af"/>
+    <p:notesMasterId xmlns:r="http://schemas.openxmlformats.org/officeDocument/2006/relationships" r:id="R97a6e9b726b747e2"/>
   </p:notesMasterIdLst>
   <p:sldIdLst>
-    <p:sldId xmlns:r="http://schemas.openxmlformats.org/officeDocument/2006/relationships" id="256" r:id="R8bab4309d06646f0"/>
-    <p:sldId xmlns:r="http://schemas.openxmlformats.org/officeDocument/2006/relationships" id="257" r:id="R4db78d544a554b28"/>
-    <p:sldId xmlns:r="http://schemas.openxmlformats.org/officeDocument/2006/relationships" id="258" r:id="Re406866faf5449b1"/>
-    <p:sldId xmlns:r="http://schemas.openxmlformats.org/officeDocument/2006/relationships" id="259" r:id="Rf2708ccbe4f44cdb"/>
-    <p:sldId xmlns:r="http://schemas.openxmlformats.org/officeDocument/2006/relationships" id="260" r:id="R2c8b502cccd54d30"/>
-    <p:sldId xmlns:r="http://schemas.openxmlformats.org/officeDocument/2006/relationships" id="261" r:id="Re251320cd99b4728"/>
-    <p:sldId xmlns:r="http://schemas.openxmlformats.org/officeDocument/2006/relationships" id="262" r:id="Rfff0cbdd16d4482e"/>
-    <p:sldId xmlns:r="http://schemas.openxmlformats.org/officeDocument/2006/relationships" id="263" r:id="R2c2bff0897a9480a"/>
-    <p:sldId xmlns:r="http://schemas.openxmlformats.org/officeDocument/2006/relationships" id="264" r:id="Rc27c0592602349b4"/>
+    <p:sldId xmlns:r="http://schemas.openxmlformats.org/officeDocument/2006/relationships" id="256" r:id="R07d9466ef7494450"/>
+    <p:sldId xmlns:r="http://schemas.openxmlformats.org/officeDocument/2006/relationships" id="257" r:id="R9afaa7db6822446e"/>
+    <p:sldId xmlns:r="http://schemas.openxmlformats.org/officeDocument/2006/relationships" id="258" r:id="R4aa73ed89311485f"/>
+    <p:sldId xmlns:r="http://schemas.openxmlformats.org/officeDocument/2006/relationships" id="259" r:id="R27723fe7dcd74da3"/>
+    <p:sldId xmlns:r="http://schemas.openxmlformats.org/officeDocument/2006/relationships" id="260" r:id="R80ab1bf29748459f"/>
+    <p:sldId xmlns:r="http://schemas.openxmlformats.org/officeDocument/2006/relationships" id="261" r:id="R8425ec0cbd474ac9"/>
+    <p:sldId xmlns:r="http://schemas.openxmlformats.org/officeDocument/2006/relationships" id="262" r:id="R9324600330424a7e"/>
+    <p:sldId xmlns:r="http://schemas.openxmlformats.org/officeDocument/2006/relationships" id="263" r:id="R840761944d804b2d"/>
+    <p:sldId xmlns:r="http://schemas.openxmlformats.org/officeDocument/2006/relationships" id="264" r:id="Rbdc05ff5d1e44c4d"/>
   </p:sldIdLst>
   <p:sldSz cx="12192000" cy="6858000"/>
   <p:notesSz cx="6858000" cy="9144000"/>
   <p:embeddedFontLst>
     <p:embeddedFont>
       <p:font typeface="JetBrains Mono"/>
-      <p:regular xmlns:r="http://schemas.openxmlformats.org/officeDocument/2006/relationships" r:id="R7cfc2b56623742fd"/>
+      <p:regular xmlns:r="http://schemas.openxmlformats.org/officeDocument/2006/relationships" r:id="Re6f3753967b545c3"/>
     </p:embeddedFont>
   </p:embeddedFontLst>
 </p:presentation>
@@ -1071,7 +1071,7 @@
           <p:nvPr/>
         </p:nvPicPr>
         <p:blipFill rotWithShape="1">
-          <a:blip xmlns:r="http://schemas.openxmlformats.org/officeDocument/2006/relationships" xmlns:a="http://schemas.openxmlformats.org/drawingml/2006/main" r:embed="R6a3f0a191aa744af"/>
+          <a:blip xmlns:r="http://schemas.openxmlformats.org/officeDocument/2006/relationships" xmlns:a="http://schemas.openxmlformats.org/drawingml/2006/main" r:embed="R55e18235a17c498f"/>
           <a:stretch xmlns:a="http://schemas.openxmlformats.org/drawingml/2006/main"/>
         </p:blipFill>
         <p:spPr>
@@ -1451,7 +1451,7 @@
           <p:nvPr/>
         </p:nvPicPr>
         <p:blipFill rotWithShape="1">
-          <a:blip xmlns:r="http://schemas.openxmlformats.org/officeDocument/2006/relationships" xmlns:a="http://schemas.openxmlformats.org/drawingml/2006/main" r:embed="R32536a3fa3c74685">
+          <a:blip xmlns:r="http://schemas.openxmlformats.org/officeDocument/2006/relationships" xmlns:a="http://schemas.openxmlformats.org/drawingml/2006/main" r:embed="R72c1863b08064fcf">
             <a:alphaModFix amt="28000"/>
           </a:blip>
           <a:stretch xmlns:a="http://schemas.openxmlformats.org/drawingml/2006/main"/>
@@ -1664,7 +1664,7 @@
           <p:nvPr/>
         </p:nvPicPr>
         <p:blipFill rotWithShape="1">
-          <a:blip xmlns:r="http://schemas.openxmlformats.org/officeDocument/2006/relationships" xmlns:a="http://schemas.openxmlformats.org/drawingml/2006/main" r:embed="R00a6e2e081df4b86">
+          <a:blip xmlns:r="http://schemas.openxmlformats.org/officeDocument/2006/relationships" xmlns:a="http://schemas.openxmlformats.org/drawingml/2006/main" r:embed="Rff277f871af244c9">
             <a:alphaModFix amt="28000"/>
           </a:blip>
           <a:stretch xmlns:a="http://schemas.openxmlformats.org/drawingml/2006/main"/>
@@ -1899,7 +1899,7 @@
           <p:nvPr/>
         </p:nvPicPr>
         <p:blipFill rotWithShape="1">
-          <a:blip xmlns:r="http://schemas.openxmlformats.org/officeDocument/2006/relationships" xmlns:a="http://schemas.openxmlformats.org/drawingml/2006/main" r:embed="R61594c6732ce40c2">
+          <a:blip xmlns:r="http://schemas.openxmlformats.org/officeDocument/2006/relationships" xmlns:a="http://schemas.openxmlformats.org/drawingml/2006/main" r:embed="R5c777bb0547c4a8d">
             <a:alphaModFix amt="28000"/>
           </a:blip>
           <a:stretch xmlns:a="http://schemas.openxmlformats.org/drawingml/2006/main"/>
@@ -2176,7 +2176,7 @@
           <p:nvPr/>
         </p:nvPicPr>
         <p:blipFill rotWithShape="1">
-          <a:blip xmlns:r="http://schemas.openxmlformats.org/officeDocument/2006/relationships" xmlns:a="http://schemas.openxmlformats.org/drawingml/2006/main" r:embed="Rc2af33b7f1404df7">
+          <a:blip xmlns:r="http://schemas.openxmlformats.org/officeDocument/2006/relationships" xmlns:a="http://schemas.openxmlformats.org/drawingml/2006/main" r:embed="R4b22bf2c39d0484b">
             <a:alphaModFix amt="28000"/>
           </a:blip>
           <a:stretch xmlns:a="http://schemas.openxmlformats.org/drawingml/2006/main"/>
@@ -2451,7 +2451,7 @@
           <p:nvPr/>
         </p:nvPicPr>
         <p:blipFill rotWithShape="1">
-          <a:blip xmlns:r="http://schemas.openxmlformats.org/officeDocument/2006/relationships" xmlns:a="http://schemas.openxmlformats.org/drawingml/2006/main" r:embed="R46afecf597a64505">
+          <a:blip xmlns:r="http://schemas.openxmlformats.org/officeDocument/2006/relationships" xmlns:a="http://schemas.openxmlformats.org/drawingml/2006/main" r:embed="R496c4a9b37044604">
             <a:alphaModFix amt="28000"/>
           </a:blip>
           <a:stretch xmlns:a="http://schemas.openxmlformats.org/drawingml/2006/main"/>
@@ -2875,7 +2875,7 @@
           <p:nvPr/>
         </p:nvPicPr>
         <p:blipFill rotWithShape="1">
-          <a:blip xmlns:r="http://schemas.openxmlformats.org/officeDocument/2006/relationships" xmlns:a="http://schemas.openxmlformats.org/drawingml/2006/main" r:embed="Rd4ccc9e5f82f4420">
+          <a:blip xmlns:r="http://schemas.openxmlformats.org/officeDocument/2006/relationships" xmlns:a="http://schemas.openxmlformats.org/drawingml/2006/main" r:embed="R26a84d671c904d06">
             <a:alphaModFix amt="28000"/>
           </a:blip>
           <a:stretch xmlns:a="http://schemas.openxmlformats.org/drawingml/2006/main"/>
@@ -3016,7 +3016,7 @@
           <p:nvPr/>
         </p:nvPicPr>
         <p:blipFill rotWithShape="1">
-          <a:blip xmlns:r="http://schemas.openxmlformats.org/officeDocument/2006/relationships" xmlns:a="http://schemas.openxmlformats.org/drawingml/2006/main" r:embed="R87adcb345af542d3">
+          <a:blip xmlns:r="http://schemas.openxmlformats.org/officeDocument/2006/relationships" xmlns:a="http://schemas.openxmlformats.org/drawingml/2006/main" r:embed="R901335e39f4a4917">
             <a:alphaModFix amt="28000"/>
           </a:blip>
           <a:stretch xmlns:a="http://schemas.openxmlformats.org/drawingml/2006/main"/>
@@ -3130,7 +3130,7 @@
           <p:nvPr/>
         </p:nvPicPr>
         <p:blipFill rotWithShape="1">
-          <a:blip xmlns:r="http://schemas.openxmlformats.org/officeDocument/2006/relationships" xmlns:a="http://schemas.openxmlformats.org/drawingml/2006/main" r:embed="Rdd7a42488e6541e4">
+          <a:blip xmlns:r="http://schemas.openxmlformats.org/officeDocument/2006/relationships" xmlns:a="http://schemas.openxmlformats.org/drawingml/2006/main" r:embed="R8deef505818b45b8">
             <a:alphaModFix amt="28000"/>
           </a:blip>
           <a:stretch xmlns:a="http://schemas.openxmlformats.org/drawingml/2006/main"/>
@@ -3457,7 +3457,7 @@
           <p:nvPr/>
         </p:nvPicPr>
         <p:blipFill rotWithShape="1">
-          <a:blip xmlns:r="http://schemas.openxmlformats.org/officeDocument/2006/relationships" xmlns:a="http://schemas.openxmlformats.org/drawingml/2006/main" r:embed="Rd3c48c512d1644d0">
+          <a:blip xmlns:r="http://schemas.openxmlformats.org/officeDocument/2006/relationships" xmlns:a="http://schemas.openxmlformats.org/drawingml/2006/main" r:embed="Raa7107ddcce943ae">
             <a:alphaModFix amt="28000"/>
           </a:blip>
           <a:stretch xmlns:a="http://schemas.openxmlformats.org/drawingml/2006/main"/>
@@ -3745,7 +3745,7 @@
           <p:nvPr/>
         </p:nvPicPr>
         <p:blipFill rotWithShape="1">
-          <a:blip xmlns:r="http://schemas.openxmlformats.org/officeDocument/2006/relationships" xmlns:a="http://schemas.openxmlformats.org/drawingml/2006/main" r:embed="R87f7bb59ee4147a4">
+          <a:blip xmlns:r="http://schemas.openxmlformats.org/officeDocument/2006/relationships" xmlns:a="http://schemas.openxmlformats.org/drawingml/2006/main" r:embed="R07dca0f5a0da455d">
             <a:alphaModFix amt="28000"/>
           </a:blip>
           <a:stretch xmlns:a="http://schemas.openxmlformats.org/drawingml/2006/main"/>
@@ -3982,17 +3982,17 @@
   </p:cSld>
   <p:clrMap bg1="lt1" tx1="dk1" bg2="lt2" tx2="dk2" accent1="accent1" accent2="accent2" accent3="accent3" accent4="accent4" accent5="accent5" accent6="accent6" hlink="hlink" folHlink="folHlink"/>
   <p:sldLayoutIdLst>
-    <p:sldLayoutId xmlns:r="http://schemas.openxmlformats.org/officeDocument/2006/relationships" id="2147483649" r:id="Rd38dc9c8777a4b3c"/>
-    <p:sldLayoutId xmlns:r="http://schemas.openxmlformats.org/officeDocument/2006/relationships" id="2147483650" r:id="Raeae5a8acfae4a7a"/>
-    <p:sldLayoutId xmlns:r="http://schemas.openxmlformats.org/officeDocument/2006/relationships" id="2147483651" r:id="R821ed749a560404e"/>
-    <p:sldLayoutId xmlns:r="http://schemas.openxmlformats.org/officeDocument/2006/relationships" id="2147483652" r:id="Ra207b62ac0a74f07"/>
-    <p:sldLayoutId xmlns:r="http://schemas.openxmlformats.org/officeDocument/2006/relationships" id="2147483653" r:id="R4c81c6fc58a044a5"/>
-    <p:sldLayoutId xmlns:r="http://schemas.openxmlformats.org/officeDocument/2006/relationships" id="2147483654" r:id="Rd73b76a10f7b4afb"/>
-    <p:sldLayoutId xmlns:r="http://schemas.openxmlformats.org/officeDocument/2006/relationships" id="2147483655" r:id="R8b63ca220d2c4f71"/>
-    <p:sldLayoutId xmlns:r="http://schemas.openxmlformats.org/officeDocument/2006/relationships" id="2147483656" r:id="Re18076cc2a5c4241"/>
-    <p:sldLayoutId xmlns:r="http://schemas.openxmlformats.org/officeDocument/2006/relationships" id="2147483657" r:id="R2a6b46f1406d41b9"/>
-    <p:sldLayoutId xmlns:r="http://schemas.openxmlformats.org/officeDocument/2006/relationships" id="2147483658" r:id="R495fe2b90b4745e8"/>
-    <p:sldLayoutId xmlns:r="http://schemas.openxmlformats.org/officeDocument/2006/relationships" id="2147483659" r:id="R695d6a304d9746c0"/>
+    <p:sldLayoutId xmlns:r="http://schemas.openxmlformats.org/officeDocument/2006/relationships" id="2147483649" r:id="R7de8598e639b43cf"/>
+    <p:sldLayoutId xmlns:r="http://schemas.openxmlformats.org/officeDocument/2006/relationships" id="2147483650" r:id="Rbdf4a63bb2ee47e8"/>
+    <p:sldLayoutId xmlns:r="http://schemas.openxmlformats.org/officeDocument/2006/relationships" id="2147483651" r:id="R1ff0af17119f4fed"/>
+    <p:sldLayoutId xmlns:r="http://schemas.openxmlformats.org/officeDocument/2006/relationships" id="2147483652" r:id="R33b92aaabf16493c"/>
+    <p:sldLayoutId xmlns:r="http://schemas.openxmlformats.org/officeDocument/2006/relationships" id="2147483653" r:id="Rd8e63280bc334ca1"/>
+    <p:sldLayoutId xmlns:r="http://schemas.openxmlformats.org/officeDocument/2006/relationships" id="2147483654" r:id="R56a1ba3a2a344ff1"/>
+    <p:sldLayoutId xmlns:r="http://schemas.openxmlformats.org/officeDocument/2006/relationships" id="2147483655" r:id="R092e001e89094b6c"/>
+    <p:sldLayoutId xmlns:r="http://schemas.openxmlformats.org/officeDocument/2006/relationships" id="2147483656" r:id="Re6ac9952a15f4c98"/>
+    <p:sldLayoutId xmlns:r="http://schemas.openxmlformats.org/officeDocument/2006/relationships" id="2147483657" r:id="Rd24730983d354b86"/>
+    <p:sldLayoutId xmlns:r="http://schemas.openxmlformats.org/officeDocument/2006/relationships" id="2147483658" r:id="R5634c926d4d34896"/>
+    <p:sldLayoutId xmlns:r="http://schemas.openxmlformats.org/officeDocument/2006/relationships" id="2147483659" r:id="R5b0d44a51bbb4569"/>
   </p:sldLayoutIdLst>
   <p:hf hdr="0" ftr="0" dt="0"/>
   <p:txStyles>

--- a/Mapped Curriculum Lessons/Grade 7/Lesson 17 - Lists/Lists - Slides.pptx
+++ b/Mapped Curriculum Lessons/Grade 7/Lesson 17 - Lists/Lists - Slides.pptx
@@ -2,28 +2,28 @@
 <file path=ppt/presentation.xml><?xml version="1.0" encoding="utf-8"?>
 <p:presentation xmlns:p="http://schemas.openxmlformats.org/presentationml/2006/main" embedTrueTypeFonts="1" saveSubsetFonts="0">
   <p:sldMasterIdLst>
-    <p:sldMasterId xmlns:r="http://schemas.openxmlformats.org/officeDocument/2006/relationships" id="2147483648" r:id="Rad78f3c42a354c3a"/>
+    <p:sldMasterId xmlns:r="http://schemas.openxmlformats.org/officeDocument/2006/relationships" id="2147483648" r:id="R00d071945e18482f"/>
   </p:sldMasterIdLst>
   <p:notesMasterIdLst>
-    <p:notesMasterId xmlns:r="http://schemas.openxmlformats.org/officeDocument/2006/relationships" r:id="R97a6e9b726b747e2"/>
+    <p:notesMasterId xmlns:r="http://schemas.openxmlformats.org/officeDocument/2006/relationships" r:id="Re3baa00468534d70"/>
   </p:notesMasterIdLst>
   <p:sldIdLst>
-    <p:sldId xmlns:r="http://schemas.openxmlformats.org/officeDocument/2006/relationships" id="256" r:id="R07d9466ef7494450"/>
-    <p:sldId xmlns:r="http://schemas.openxmlformats.org/officeDocument/2006/relationships" id="257" r:id="R9afaa7db6822446e"/>
-    <p:sldId xmlns:r="http://schemas.openxmlformats.org/officeDocument/2006/relationships" id="258" r:id="R4aa73ed89311485f"/>
-    <p:sldId xmlns:r="http://schemas.openxmlformats.org/officeDocument/2006/relationships" id="259" r:id="R27723fe7dcd74da3"/>
-    <p:sldId xmlns:r="http://schemas.openxmlformats.org/officeDocument/2006/relationships" id="260" r:id="R80ab1bf29748459f"/>
-    <p:sldId xmlns:r="http://schemas.openxmlformats.org/officeDocument/2006/relationships" id="261" r:id="R8425ec0cbd474ac9"/>
-    <p:sldId xmlns:r="http://schemas.openxmlformats.org/officeDocument/2006/relationships" id="262" r:id="R9324600330424a7e"/>
-    <p:sldId xmlns:r="http://schemas.openxmlformats.org/officeDocument/2006/relationships" id="263" r:id="R840761944d804b2d"/>
-    <p:sldId xmlns:r="http://schemas.openxmlformats.org/officeDocument/2006/relationships" id="264" r:id="Rbdc05ff5d1e44c4d"/>
+    <p:sldId xmlns:r="http://schemas.openxmlformats.org/officeDocument/2006/relationships" id="256" r:id="Raeb04c703c2a4c02"/>
+    <p:sldId xmlns:r="http://schemas.openxmlformats.org/officeDocument/2006/relationships" id="257" r:id="R649da8a5b29a4ddc"/>
+    <p:sldId xmlns:r="http://schemas.openxmlformats.org/officeDocument/2006/relationships" id="258" r:id="Rc899d0e3dfee49d0"/>
+    <p:sldId xmlns:r="http://schemas.openxmlformats.org/officeDocument/2006/relationships" id="259" r:id="R881caebf6f9a4230"/>
+    <p:sldId xmlns:r="http://schemas.openxmlformats.org/officeDocument/2006/relationships" id="260" r:id="Rd3933a08d1e74799"/>
+    <p:sldId xmlns:r="http://schemas.openxmlformats.org/officeDocument/2006/relationships" id="261" r:id="R7a655669c1b54559"/>
+    <p:sldId xmlns:r="http://schemas.openxmlformats.org/officeDocument/2006/relationships" id="262" r:id="R896ae9acfa844cf7"/>
+    <p:sldId xmlns:r="http://schemas.openxmlformats.org/officeDocument/2006/relationships" id="263" r:id="Rc95f8dcfa9aa42b5"/>
+    <p:sldId xmlns:r="http://schemas.openxmlformats.org/officeDocument/2006/relationships" id="264" r:id="R309d67824ad74788"/>
   </p:sldIdLst>
   <p:sldSz cx="12192000" cy="6858000"/>
   <p:notesSz cx="6858000" cy="9144000"/>
   <p:embeddedFontLst>
     <p:embeddedFont>
       <p:font typeface="JetBrains Mono"/>
-      <p:regular xmlns:r="http://schemas.openxmlformats.org/officeDocument/2006/relationships" r:id="Re6f3753967b545c3"/>
+      <p:regular xmlns:r="http://schemas.openxmlformats.org/officeDocument/2006/relationships" r:id="R6254dcd394c34be8"/>
     </p:embeddedFont>
   </p:embeddedFontLst>
 </p:presentation>
@@ -1071,7 +1071,7 @@
           <p:nvPr/>
         </p:nvPicPr>
         <p:blipFill rotWithShape="1">
-          <a:blip xmlns:r="http://schemas.openxmlformats.org/officeDocument/2006/relationships" xmlns:a="http://schemas.openxmlformats.org/drawingml/2006/main" r:embed="R55e18235a17c498f"/>
+          <a:blip xmlns:r="http://schemas.openxmlformats.org/officeDocument/2006/relationships" xmlns:a="http://schemas.openxmlformats.org/drawingml/2006/main" r:embed="Rfeb4da42bfd04e43"/>
           <a:stretch xmlns:a="http://schemas.openxmlformats.org/drawingml/2006/main"/>
         </p:blipFill>
         <p:spPr>
@@ -1451,7 +1451,7 @@
           <p:nvPr/>
         </p:nvPicPr>
         <p:blipFill rotWithShape="1">
-          <a:blip xmlns:r="http://schemas.openxmlformats.org/officeDocument/2006/relationships" xmlns:a="http://schemas.openxmlformats.org/drawingml/2006/main" r:embed="R72c1863b08064fcf">
+          <a:blip xmlns:r="http://schemas.openxmlformats.org/officeDocument/2006/relationships" xmlns:a="http://schemas.openxmlformats.org/drawingml/2006/main" r:embed="Ra3ab67f447b8488c">
             <a:alphaModFix amt="28000"/>
           </a:blip>
           <a:stretch xmlns:a="http://schemas.openxmlformats.org/drawingml/2006/main"/>
@@ -1664,7 +1664,7 @@
           <p:nvPr/>
         </p:nvPicPr>
         <p:blipFill rotWithShape="1">
-          <a:blip xmlns:r="http://schemas.openxmlformats.org/officeDocument/2006/relationships" xmlns:a="http://schemas.openxmlformats.org/drawingml/2006/main" r:embed="Rff277f871af244c9">
+          <a:blip xmlns:r="http://schemas.openxmlformats.org/officeDocument/2006/relationships" xmlns:a="http://schemas.openxmlformats.org/drawingml/2006/main" r:embed="R785e50686d5c426a">
             <a:alphaModFix amt="28000"/>
           </a:blip>
           <a:stretch xmlns:a="http://schemas.openxmlformats.org/drawingml/2006/main"/>
@@ -1899,7 +1899,7 @@
           <p:nvPr/>
         </p:nvPicPr>
         <p:blipFill rotWithShape="1">
-          <a:blip xmlns:r="http://schemas.openxmlformats.org/officeDocument/2006/relationships" xmlns:a="http://schemas.openxmlformats.org/drawingml/2006/main" r:embed="R5c777bb0547c4a8d">
+          <a:blip xmlns:r="http://schemas.openxmlformats.org/officeDocument/2006/relationships" xmlns:a="http://schemas.openxmlformats.org/drawingml/2006/main" r:embed="Rc4a6a046ffad4071">
             <a:alphaModFix amt="28000"/>
           </a:blip>
           <a:stretch xmlns:a="http://schemas.openxmlformats.org/drawingml/2006/main"/>
@@ -2176,7 +2176,7 @@
           <p:nvPr/>
         </p:nvPicPr>
         <p:blipFill rotWithShape="1">
-          <a:blip xmlns:r="http://schemas.openxmlformats.org/officeDocument/2006/relationships" xmlns:a="http://schemas.openxmlformats.org/drawingml/2006/main" r:embed="R4b22bf2c39d0484b">
+          <a:blip xmlns:r="http://schemas.openxmlformats.org/officeDocument/2006/relationships" xmlns:a="http://schemas.openxmlformats.org/drawingml/2006/main" r:embed="R36627256d3c14378">
             <a:alphaModFix amt="28000"/>
           </a:blip>
           <a:stretch xmlns:a="http://schemas.openxmlformats.org/drawingml/2006/main"/>
@@ -2451,7 +2451,7 @@
           <p:nvPr/>
         </p:nvPicPr>
         <p:blipFill rotWithShape="1">
-          <a:blip xmlns:r="http://schemas.openxmlformats.org/officeDocument/2006/relationships" xmlns:a="http://schemas.openxmlformats.org/drawingml/2006/main" r:embed="R496c4a9b37044604">
+          <a:blip xmlns:r="http://schemas.openxmlformats.org/officeDocument/2006/relationships" xmlns:a="http://schemas.openxmlformats.org/drawingml/2006/main" r:embed="R1870214874f1436b">
             <a:alphaModFix amt="28000"/>
           </a:blip>
           <a:stretch xmlns:a="http://schemas.openxmlformats.org/drawingml/2006/main"/>
@@ -2875,7 +2875,7 @@
           <p:nvPr/>
         </p:nvPicPr>
         <p:blipFill rotWithShape="1">
-          <a:blip xmlns:r="http://schemas.openxmlformats.org/officeDocument/2006/relationships" xmlns:a="http://schemas.openxmlformats.org/drawingml/2006/main" r:embed="R26a84d671c904d06">
+          <a:blip xmlns:r="http://schemas.openxmlformats.org/officeDocument/2006/relationships" xmlns:a="http://schemas.openxmlformats.org/drawingml/2006/main" r:embed="R457df720b9b84e6a">
             <a:alphaModFix amt="28000"/>
           </a:blip>
           <a:stretch xmlns:a="http://schemas.openxmlformats.org/drawingml/2006/main"/>
@@ -3016,7 +3016,7 @@
           <p:nvPr/>
         </p:nvPicPr>
         <p:blipFill rotWithShape="1">
-          <a:blip xmlns:r="http://schemas.openxmlformats.org/officeDocument/2006/relationships" xmlns:a="http://schemas.openxmlformats.org/drawingml/2006/main" r:embed="R901335e39f4a4917">
+          <a:blip xmlns:r="http://schemas.openxmlformats.org/officeDocument/2006/relationships" xmlns:a="http://schemas.openxmlformats.org/drawingml/2006/main" r:embed="R6afdbe74995d455f">
             <a:alphaModFix amt="28000"/>
           </a:blip>
           <a:stretch xmlns:a="http://schemas.openxmlformats.org/drawingml/2006/main"/>
@@ -3130,7 +3130,7 @@
           <p:nvPr/>
         </p:nvPicPr>
         <p:blipFill rotWithShape="1">
-          <a:blip xmlns:r="http://schemas.openxmlformats.org/officeDocument/2006/relationships" xmlns:a="http://schemas.openxmlformats.org/drawingml/2006/main" r:embed="R8deef505818b45b8">
+          <a:blip xmlns:r="http://schemas.openxmlformats.org/officeDocument/2006/relationships" xmlns:a="http://schemas.openxmlformats.org/drawingml/2006/main" r:embed="Rf01b50f4834d4be2">
             <a:alphaModFix amt="28000"/>
           </a:blip>
           <a:stretch xmlns:a="http://schemas.openxmlformats.org/drawingml/2006/main"/>
@@ -3457,7 +3457,7 @@
           <p:nvPr/>
         </p:nvPicPr>
         <p:blipFill rotWithShape="1">
-          <a:blip xmlns:r="http://schemas.openxmlformats.org/officeDocument/2006/relationships" xmlns:a="http://schemas.openxmlformats.org/drawingml/2006/main" r:embed="Raa7107ddcce943ae">
+          <a:blip xmlns:r="http://schemas.openxmlformats.org/officeDocument/2006/relationships" xmlns:a="http://schemas.openxmlformats.org/drawingml/2006/main" r:embed="Rbe15f7ff29c04dfe">
             <a:alphaModFix amt="28000"/>
           </a:blip>
           <a:stretch xmlns:a="http://schemas.openxmlformats.org/drawingml/2006/main"/>
@@ -3745,7 +3745,7 @@
           <p:nvPr/>
         </p:nvPicPr>
         <p:blipFill rotWithShape="1">
-          <a:blip xmlns:r="http://schemas.openxmlformats.org/officeDocument/2006/relationships" xmlns:a="http://schemas.openxmlformats.org/drawingml/2006/main" r:embed="R07dca0f5a0da455d">
+          <a:blip xmlns:r="http://schemas.openxmlformats.org/officeDocument/2006/relationships" xmlns:a="http://schemas.openxmlformats.org/drawingml/2006/main" r:embed="R1fa94b2ba6f44fa1">
             <a:alphaModFix amt="28000"/>
           </a:blip>
           <a:stretch xmlns:a="http://schemas.openxmlformats.org/drawingml/2006/main"/>
@@ -3982,17 +3982,17 @@
   </p:cSld>
   <p:clrMap bg1="lt1" tx1="dk1" bg2="lt2" tx2="dk2" accent1="accent1" accent2="accent2" accent3="accent3" accent4="accent4" accent5="accent5" accent6="accent6" hlink="hlink" folHlink="folHlink"/>
   <p:sldLayoutIdLst>
-    <p:sldLayoutId xmlns:r="http://schemas.openxmlformats.org/officeDocument/2006/relationships" id="2147483649" r:id="R7de8598e639b43cf"/>
-    <p:sldLayoutId xmlns:r="http://schemas.openxmlformats.org/officeDocument/2006/relationships" id="2147483650" r:id="Rbdf4a63bb2ee47e8"/>
-    <p:sldLayoutId xmlns:r="http://schemas.openxmlformats.org/officeDocument/2006/relationships" id="2147483651" r:id="R1ff0af17119f4fed"/>
-    <p:sldLayoutId xmlns:r="http://schemas.openxmlformats.org/officeDocument/2006/relationships" id="2147483652" r:id="R33b92aaabf16493c"/>
-    <p:sldLayoutId xmlns:r="http://schemas.openxmlformats.org/officeDocument/2006/relationships" id="2147483653" r:id="Rd8e63280bc334ca1"/>
-    <p:sldLayoutId xmlns:r="http://schemas.openxmlformats.org/officeDocument/2006/relationships" id="2147483654" r:id="R56a1ba3a2a344ff1"/>
-    <p:sldLayoutId xmlns:r="http://schemas.openxmlformats.org/officeDocument/2006/relationships" id="2147483655" r:id="R092e001e89094b6c"/>
-    <p:sldLayoutId xmlns:r="http://schemas.openxmlformats.org/officeDocument/2006/relationships" id="2147483656" r:id="Re6ac9952a15f4c98"/>
-    <p:sldLayoutId xmlns:r="http://schemas.openxmlformats.org/officeDocument/2006/relationships" id="2147483657" r:id="Rd24730983d354b86"/>
-    <p:sldLayoutId xmlns:r="http://schemas.openxmlformats.org/officeDocument/2006/relationships" id="2147483658" r:id="R5634c926d4d34896"/>
-    <p:sldLayoutId xmlns:r="http://schemas.openxmlformats.org/officeDocument/2006/relationships" id="2147483659" r:id="R5b0d44a51bbb4569"/>
+    <p:sldLayoutId xmlns:r="http://schemas.openxmlformats.org/officeDocument/2006/relationships" id="2147483649" r:id="R1cf8f393bd404264"/>
+    <p:sldLayoutId xmlns:r="http://schemas.openxmlformats.org/officeDocument/2006/relationships" id="2147483650" r:id="R7e3030098ed84b7f"/>
+    <p:sldLayoutId xmlns:r="http://schemas.openxmlformats.org/officeDocument/2006/relationships" id="2147483651" r:id="R2ed905650d9e490a"/>
+    <p:sldLayoutId xmlns:r="http://schemas.openxmlformats.org/officeDocument/2006/relationships" id="2147483652" r:id="R57b6576bec6b418f"/>
+    <p:sldLayoutId xmlns:r="http://schemas.openxmlformats.org/officeDocument/2006/relationships" id="2147483653" r:id="Rb5a02be6d61b4529"/>
+    <p:sldLayoutId xmlns:r="http://schemas.openxmlformats.org/officeDocument/2006/relationships" id="2147483654" r:id="R7386168c41374e8b"/>
+    <p:sldLayoutId xmlns:r="http://schemas.openxmlformats.org/officeDocument/2006/relationships" id="2147483655" r:id="Ra184f236456648a7"/>
+    <p:sldLayoutId xmlns:r="http://schemas.openxmlformats.org/officeDocument/2006/relationships" id="2147483656" r:id="R0ca072a8b3a34526"/>
+    <p:sldLayoutId xmlns:r="http://schemas.openxmlformats.org/officeDocument/2006/relationships" id="2147483657" r:id="Re699c1c71d7b43eb"/>
+    <p:sldLayoutId xmlns:r="http://schemas.openxmlformats.org/officeDocument/2006/relationships" id="2147483658" r:id="R472df6f67b454c44"/>
+    <p:sldLayoutId xmlns:r="http://schemas.openxmlformats.org/officeDocument/2006/relationships" id="2147483659" r:id="R4710568208ec4e7e"/>
   </p:sldLayoutIdLst>
   <p:hf hdr="0" ftr="0" dt="0"/>
   <p:txStyles>

--- a/Mapped Curriculum Lessons/Grade 7/Lesson 17 - Lists/Lists - Slides.pptx
+++ b/Mapped Curriculum Lessons/Grade 7/Lesson 17 - Lists/Lists - Slides.pptx
@@ -2,28 +2,28 @@
 <file path=ppt/presentation.xml><?xml version="1.0" encoding="utf-8"?>
 <p:presentation xmlns:p="http://schemas.openxmlformats.org/presentationml/2006/main" embedTrueTypeFonts="1" saveSubsetFonts="0">
   <p:sldMasterIdLst>
-    <p:sldMasterId xmlns:r="http://schemas.openxmlformats.org/officeDocument/2006/relationships" id="2147483648" r:id="R00d071945e18482f"/>
+    <p:sldMasterId xmlns:r="http://schemas.openxmlformats.org/officeDocument/2006/relationships" id="2147483648" r:id="R5c352aff60cb4017"/>
   </p:sldMasterIdLst>
   <p:notesMasterIdLst>
-    <p:notesMasterId xmlns:r="http://schemas.openxmlformats.org/officeDocument/2006/relationships" r:id="Re3baa00468534d70"/>
+    <p:notesMasterId xmlns:r="http://schemas.openxmlformats.org/officeDocument/2006/relationships" r:id="Rd0383674cbc44517"/>
   </p:notesMasterIdLst>
   <p:sldIdLst>
-    <p:sldId xmlns:r="http://schemas.openxmlformats.org/officeDocument/2006/relationships" id="256" r:id="Raeb04c703c2a4c02"/>
-    <p:sldId xmlns:r="http://schemas.openxmlformats.org/officeDocument/2006/relationships" id="257" r:id="R649da8a5b29a4ddc"/>
-    <p:sldId xmlns:r="http://schemas.openxmlformats.org/officeDocument/2006/relationships" id="258" r:id="Rc899d0e3dfee49d0"/>
-    <p:sldId xmlns:r="http://schemas.openxmlformats.org/officeDocument/2006/relationships" id="259" r:id="R881caebf6f9a4230"/>
-    <p:sldId xmlns:r="http://schemas.openxmlformats.org/officeDocument/2006/relationships" id="260" r:id="Rd3933a08d1e74799"/>
-    <p:sldId xmlns:r="http://schemas.openxmlformats.org/officeDocument/2006/relationships" id="261" r:id="R7a655669c1b54559"/>
-    <p:sldId xmlns:r="http://schemas.openxmlformats.org/officeDocument/2006/relationships" id="262" r:id="R896ae9acfa844cf7"/>
-    <p:sldId xmlns:r="http://schemas.openxmlformats.org/officeDocument/2006/relationships" id="263" r:id="Rc95f8dcfa9aa42b5"/>
-    <p:sldId xmlns:r="http://schemas.openxmlformats.org/officeDocument/2006/relationships" id="264" r:id="R309d67824ad74788"/>
+    <p:sldId xmlns:r="http://schemas.openxmlformats.org/officeDocument/2006/relationships" id="256" r:id="R5ec38bf4659a431b"/>
+    <p:sldId xmlns:r="http://schemas.openxmlformats.org/officeDocument/2006/relationships" id="257" r:id="R20e29e47def641cf"/>
+    <p:sldId xmlns:r="http://schemas.openxmlformats.org/officeDocument/2006/relationships" id="258" r:id="R6ffccd46eb534f63"/>
+    <p:sldId xmlns:r="http://schemas.openxmlformats.org/officeDocument/2006/relationships" id="259" r:id="Rde13bd83de564c08"/>
+    <p:sldId xmlns:r="http://schemas.openxmlformats.org/officeDocument/2006/relationships" id="260" r:id="Rebee14f4534d49d5"/>
+    <p:sldId xmlns:r="http://schemas.openxmlformats.org/officeDocument/2006/relationships" id="261" r:id="R9c37b34092fc463f"/>
+    <p:sldId xmlns:r="http://schemas.openxmlformats.org/officeDocument/2006/relationships" id="262" r:id="R803e3d29545e4edf"/>
+    <p:sldId xmlns:r="http://schemas.openxmlformats.org/officeDocument/2006/relationships" id="263" r:id="Rf3e6c4b883eb433a"/>
+    <p:sldId xmlns:r="http://schemas.openxmlformats.org/officeDocument/2006/relationships" id="264" r:id="R06b327d42b184a52"/>
   </p:sldIdLst>
   <p:sldSz cx="12192000" cy="6858000"/>
   <p:notesSz cx="6858000" cy="9144000"/>
   <p:embeddedFontLst>
     <p:embeddedFont>
       <p:font typeface="JetBrains Mono"/>
-      <p:regular xmlns:r="http://schemas.openxmlformats.org/officeDocument/2006/relationships" r:id="R6254dcd394c34be8"/>
+      <p:regular xmlns:r="http://schemas.openxmlformats.org/officeDocument/2006/relationships" r:id="R6ab65141ea22455e"/>
     </p:embeddedFont>
   </p:embeddedFontLst>
 </p:presentation>
@@ -1071,7 +1071,7 @@
           <p:nvPr/>
         </p:nvPicPr>
         <p:blipFill rotWithShape="1">
-          <a:blip xmlns:r="http://schemas.openxmlformats.org/officeDocument/2006/relationships" xmlns:a="http://schemas.openxmlformats.org/drawingml/2006/main" r:embed="Rfeb4da42bfd04e43"/>
+          <a:blip xmlns:r="http://schemas.openxmlformats.org/officeDocument/2006/relationships" xmlns:a="http://schemas.openxmlformats.org/drawingml/2006/main" r:embed="R53d71171e1394c2d"/>
           <a:stretch xmlns:a="http://schemas.openxmlformats.org/drawingml/2006/main"/>
         </p:blipFill>
         <p:spPr>
@@ -1451,7 +1451,7 @@
           <p:nvPr/>
         </p:nvPicPr>
         <p:blipFill rotWithShape="1">
-          <a:blip xmlns:r="http://schemas.openxmlformats.org/officeDocument/2006/relationships" xmlns:a="http://schemas.openxmlformats.org/drawingml/2006/main" r:embed="Ra3ab67f447b8488c">
+          <a:blip xmlns:r="http://schemas.openxmlformats.org/officeDocument/2006/relationships" xmlns:a="http://schemas.openxmlformats.org/drawingml/2006/main" r:embed="Rf9552e4a430c4e3d">
             <a:alphaModFix amt="28000"/>
           </a:blip>
           <a:stretch xmlns:a="http://schemas.openxmlformats.org/drawingml/2006/main"/>
@@ -1664,7 +1664,7 @@
           <p:nvPr/>
         </p:nvPicPr>
         <p:blipFill rotWithShape="1">
-          <a:blip xmlns:r="http://schemas.openxmlformats.org/officeDocument/2006/relationships" xmlns:a="http://schemas.openxmlformats.org/drawingml/2006/main" r:embed="R785e50686d5c426a">
+          <a:blip xmlns:r="http://schemas.openxmlformats.org/officeDocument/2006/relationships" xmlns:a="http://schemas.openxmlformats.org/drawingml/2006/main" r:embed="Re5b379287ba54e63">
             <a:alphaModFix amt="28000"/>
           </a:blip>
           <a:stretch xmlns:a="http://schemas.openxmlformats.org/drawingml/2006/main"/>
@@ -1899,7 +1899,7 @@
           <p:nvPr/>
         </p:nvPicPr>
         <p:blipFill rotWithShape="1">
-          <a:blip xmlns:r="http://schemas.openxmlformats.org/officeDocument/2006/relationships" xmlns:a="http://schemas.openxmlformats.org/drawingml/2006/main" r:embed="Rc4a6a046ffad4071">
+          <a:blip xmlns:r="http://schemas.openxmlformats.org/officeDocument/2006/relationships" xmlns:a="http://schemas.openxmlformats.org/drawingml/2006/main" r:embed="Rfb692cf33ea444d9">
             <a:alphaModFix amt="28000"/>
           </a:blip>
           <a:stretch xmlns:a="http://schemas.openxmlformats.org/drawingml/2006/main"/>
@@ -2176,7 +2176,7 @@
           <p:nvPr/>
         </p:nvPicPr>
         <p:blipFill rotWithShape="1">
-          <a:blip xmlns:r="http://schemas.openxmlformats.org/officeDocument/2006/relationships" xmlns:a="http://schemas.openxmlformats.org/drawingml/2006/main" r:embed="R36627256d3c14378">
+          <a:blip xmlns:r="http://schemas.openxmlformats.org/officeDocument/2006/relationships" xmlns:a="http://schemas.openxmlformats.org/drawingml/2006/main" r:embed="R92f7068d3e3c4a75">
             <a:alphaModFix amt="28000"/>
           </a:blip>
           <a:stretch xmlns:a="http://schemas.openxmlformats.org/drawingml/2006/main"/>
@@ -2451,7 +2451,7 @@
           <p:nvPr/>
         </p:nvPicPr>
         <p:blipFill rotWithShape="1">
-          <a:blip xmlns:r="http://schemas.openxmlformats.org/officeDocument/2006/relationships" xmlns:a="http://schemas.openxmlformats.org/drawingml/2006/main" r:embed="R1870214874f1436b">
+          <a:blip xmlns:r="http://schemas.openxmlformats.org/officeDocument/2006/relationships" xmlns:a="http://schemas.openxmlformats.org/drawingml/2006/main" r:embed="R22053bccd98347a6">
             <a:alphaModFix amt="28000"/>
           </a:blip>
           <a:stretch xmlns:a="http://schemas.openxmlformats.org/drawingml/2006/main"/>
@@ -2875,7 +2875,7 @@
           <p:nvPr/>
         </p:nvPicPr>
         <p:blipFill rotWithShape="1">
-          <a:blip xmlns:r="http://schemas.openxmlformats.org/officeDocument/2006/relationships" xmlns:a="http://schemas.openxmlformats.org/drawingml/2006/main" r:embed="R457df720b9b84e6a">
+          <a:blip xmlns:r="http://schemas.openxmlformats.org/officeDocument/2006/relationships" xmlns:a="http://schemas.openxmlformats.org/drawingml/2006/main" r:embed="Raa28ea91149841b8">
             <a:alphaModFix amt="28000"/>
           </a:blip>
           <a:stretch xmlns:a="http://schemas.openxmlformats.org/drawingml/2006/main"/>
@@ -3016,7 +3016,7 @@
           <p:nvPr/>
         </p:nvPicPr>
         <p:blipFill rotWithShape="1">
-          <a:blip xmlns:r="http://schemas.openxmlformats.org/officeDocument/2006/relationships" xmlns:a="http://schemas.openxmlformats.org/drawingml/2006/main" r:embed="R6afdbe74995d455f">
+          <a:blip xmlns:r="http://schemas.openxmlformats.org/officeDocument/2006/relationships" xmlns:a="http://schemas.openxmlformats.org/drawingml/2006/main" r:embed="R666bfb8a1074412a">
             <a:alphaModFix amt="28000"/>
           </a:blip>
           <a:stretch xmlns:a="http://schemas.openxmlformats.org/drawingml/2006/main"/>
@@ -3130,7 +3130,7 @@
           <p:nvPr/>
         </p:nvPicPr>
         <p:blipFill rotWithShape="1">
-          <a:blip xmlns:r="http://schemas.openxmlformats.org/officeDocument/2006/relationships" xmlns:a="http://schemas.openxmlformats.org/drawingml/2006/main" r:embed="Rf01b50f4834d4be2">
+          <a:blip xmlns:r="http://schemas.openxmlformats.org/officeDocument/2006/relationships" xmlns:a="http://schemas.openxmlformats.org/drawingml/2006/main" r:embed="R3cf41fcea6bd42e6">
             <a:alphaModFix amt="28000"/>
           </a:blip>
           <a:stretch xmlns:a="http://schemas.openxmlformats.org/drawingml/2006/main"/>
@@ -3457,7 +3457,7 @@
           <p:nvPr/>
         </p:nvPicPr>
         <p:blipFill rotWithShape="1">
-          <a:blip xmlns:r="http://schemas.openxmlformats.org/officeDocument/2006/relationships" xmlns:a="http://schemas.openxmlformats.org/drawingml/2006/main" r:embed="Rbe15f7ff29c04dfe">
+          <a:blip xmlns:r="http://schemas.openxmlformats.org/officeDocument/2006/relationships" xmlns:a="http://schemas.openxmlformats.org/drawingml/2006/main" r:embed="R668b11f7c769438c">
             <a:alphaModFix amt="28000"/>
           </a:blip>
           <a:stretch xmlns:a="http://schemas.openxmlformats.org/drawingml/2006/main"/>
@@ -3745,7 +3745,7 @@
           <p:nvPr/>
         </p:nvPicPr>
         <p:blipFill rotWithShape="1">
-          <a:blip xmlns:r="http://schemas.openxmlformats.org/officeDocument/2006/relationships" xmlns:a="http://schemas.openxmlformats.org/drawingml/2006/main" r:embed="R1fa94b2ba6f44fa1">
+          <a:blip xmlns:r="http://schemas.openxmlformats.org/officeDocument/2006/relationships" xmlns:a="http://schemas.openxmlformats.org/drawingml/2006/main" r:embed="R4ae91dfe56e04676">
             <a:alphaModFix amt="28000"/>
           </a:blip>
           <a:stretch xmlns:a="http://schemas.openxmlformats.org/drawingml/2006/main"/>
@@ -3982,17 +3982,17 @@
   </p:cSld>
   <p:clrMap bg1="lt1" tx1="dk1" bg2="lt2" tx2="dk2" accent1="accent1" accent2="accent2" accent3="accent3" accent4="accent4" accent5="accent5" accent6="accent6" hlink="hlink" folHlink="folHlink"/>
   <p:sldLayoutIdLst>
-    <p:sldLayoutId xmlns:r="http://schemas.openxmlformats.org/officeDocument/2006/relationships" id="2147483649" r:id="R1cf8f393bd404264"/>
-    <p:sldLayoutId xmlns:r="http://schemas.openxmlformats.org/officeDocument/2006/relationships" id="2147483650" r:id="R7e3030098ed84b7f"/>
-    <p:sldLayoutId xmlns:r="http://schemas.openxmlformats.org/officeDocument/2006/relationships" id="2147483651" r:id="R2ed905650d9e490a"/>
-    <p:sldLayoutId xmlns:r="http://schemas.openxmlformats.org/officeDocument/2006/relationships" id="2147483652" r:id="R57b6576bec6b418f"/>
-    <p:sldLayoutId xmlns:r="http://schemas.openxmlformats.org/officeDocument/2006/relationships" id="2147483653" r:id="Rb5a02be6d61b4529"/>
-    <p:sldLayoutId xmlns:r="http://schemas.openxmlformats.org/officeDocument/2006/relationships" id="2147483654" r:id="R7386168c41374e8b"/>
-    <p:sldLayoutId xmlns:r="http://schemas.openxmlformats.org/officeDocument/2006/relationships" id="2147483655" r:id="Ra184f236456648a7"/>
-    <p:sldLayoutId xmlns:r="http://schemas.openxmlformats.org/officeDocument/2006/relationships" id="2147483656" r:id="R0ca072a8b3a34526"/>
-    <p:sldLayoutId xmlns:r="http://schemas.openxmlformats.org/officeDocument/2006/relationships" id="2147483657" r:id="Re699c1c71d7b43eb"/>
-    <p:sldLayoutId xmlns:r="http://schemas.openxmlformats.org/officeDocument/2006/relationships" id="2147483658" r:id="R472df6f67b454c44"/>
-    <p:sldLayoutId xmlns:r="http://schemas.openxmlformats.org/officeDocument/2006/relationships" id="2147483659" r:id="R4710568208ec4e7e"/>
+    <p:sldLayoutId xmlns:r="http://schemas.openxmlformats.org/officeDocument/2006/relationships" id="2147483649" r:id="Rbf9a295c67de44b8"/>
+    <p:sldLayoutId xmlns:r="http://schemas.openxmlformats.org/officeDocument/2006/relationships" id="2147483650" r:id="R9b0f8dd7ca8c4f53"/>
+    <p:sldLayoutId xmlns:r="http://schemas.openxmlformats.org/officeDocument/2006/relationships" id="2147483651" r:id="R37c4e0eee4234920"/>
+    <p:sldLayoutId xmlns:r="http://schemas.openxmlformats.org/officeDocument/2006/relationships" id="2147483652" r:id="Rf39484236ffa476f"/>
+    <p:sldLayoutId xmlns:r="http://schemas.openxmlformats.org/officeDocument/2006/relationships" id="2147483653" r:id="R48e9f649cb9e481c"/>
+    <p:sldLayoutId xmlns:r="http://schemas.openxmlformats.org/officeDocument/2006/relationships" id="2147483654" r:id="R93c829a684af48c1"/>
+    <p:sldLayoutId xmlns:r="http://schemas.openxmlformats.org/officeDocument/2006/relationships" id="2147483655" r:id="Raec3b8eb47ed4d8e"/>
+    <p:sldLayoutId xmlns:r="http://schemas.openxmlformats.org/officeDocument/2006/relationships" id="2147483656" r:id="Rf7d8fd83638449d5"/>
+    <p:sldLayoutId xmlns:r="http://schemas.openxmlformats.org/officeDocument/2006/relationships" id="2147483657" r:id="R47e82dce9a2b43f2"/>
+    <p:sldLayoutId xmlns:r="http://schemas.openxmlformats.org/officeDocument/2006/relationships" id="2147483658" r:id="Rbee588b71db94eb5"/>
+    <p:sldLayoutId xmlns:r="http://schemas.openxmlformats.org/officeDocument/2006/relationships" id="2147483659" r:id="R8f13702886bd4f4c"/>
   </p:sldLayoutIdLst>
   <p:hf hdr="0" ftr="0" dt="0"/>
   <p:txStyles>
